--- a/BRATS_2D_UNet_Presentation.pptx
+++ b/BRATS_2D_UNet_Presentation.pptx
@@ -2,26 +2,27 @@
 <file path=ppt/presentation.xml><?xml version="1.0" encoding="utf-8"?>
 <p:presentation xmlns:a="http://schemas.openxmlformats.org/drawingml/2006/main" xmlns:r="http://schemas.openxmlformats.org/officeDocument/2006/relationships" xmlns:p="http://schemas.openxmlformats.org/presentationml/2006/main" saveSubsetFonts="1" autoCompressPictures="0">
   <p:sldMasterIdLst>
-    <p:sldMasterId id="2147483648" r:id="rId1"/>
+    <p:sldMasterId id="2147483660" r:id="rId1"/>
   </p:sldMasterIdLst>
   <p:sldIdLst>
-    <p:sldId id="256" r:id="rId7"/>
-    <p:sldId id="257" r:id="rId8"/>
-    <p:sldId id="258" r:id="rId9"/>
-    <p:sldId id="259" r:id="rId10"/>
-    <p:sldId id="260" r:id="rId11"/>
-    <p:sldId id="261" r:id="rId12"/>
-    <p:sldId id="262" r:id="rId13"/>
-    <p:sldId id="263" r:id="rId14"/>
-    <p:sldId id="264" r:id="rId15"/>
-    <p:sldId id="265" r:id="rId16"/>
-    <p:sldId id="266" r:id="rId17"/>
-    <p:sldId id="267" r:id="rId18"/>
-    <p:sldId id="268" r:id="rId19"/>
-    <p:sldId id="269" r:id="rId20"/>
-    <p:sldId id="270" r:id="rId21"/>
-    <p:sldId id="271" r:id="rId22"/>
-    <p:sldId id="272" r:id="rId23"/>
+    <p:sldId id="256" r:id="rId2"/>
+    <p:sldId id="273" r:id="rId3"/>
+    <p:sldId id="257" r:id="rId4"/>
+    <p:sldId id="258" r:id="rId5"/>
+    <p:sldId id="259" r:id="rId6"/>
+    <p:sldId id="260" r:id="rId7"/>
+    <p:sldId id="261" r:id="rId8"/>
+    <p:sldId id="262" r:id="rId9"/>
+    <p:sldId id="263" r:id="rId10"/>
+    <p:sldId id="264" r:id="rId11"/>
+    <p:sldId id="265" r:id="rId12"/>
+    <p:sldId id="266" r:id="rId13"/>
+    <p:sldId id="267" r:id="rId14"/>
+    <p:sldId id="268" r:id="rId15"/>
+    <p:sldId id="269" r:id="rId16"/>
+    <p:sldId id="270" r:id="rId17"/>
+    <p:sldId id="271" r:id="rId18"/>
+    <p:sldId id="272" r:id="rId19"/>
   </p:sldIdLst>
   <p:sldSz cx="9144000" cy="6858000" type="screen4x3"/>
   <p:notesSz cx="6858000" cy="9144000"/>
@@ -120,12 +121,36 @@
       </a:defRPr>
     </a:lvl9pPr>
   </p:defaultTextStyle>
+  <p:extLst>
+    <p:ext uri="{EFAFB233-063F-42B5-8137-9DF3F51BA10A}">
+      <p15:sldGuideLst xmlns:p15="http://schemas.microsoft.com/office/powerpoint/2012/main">
+        <p15:guide id="1" orient="horz" pos="2160">
+          <p15:clr>
+            <a:srgbClr val="A4A3A4"/>
+          </p15:clr>
+        </p15:guide>
+        <p15:guide id="2" pos="2880">
+          <p15:clr>
+            <a:srgbClr val="A4A3A4"/>
+          </p15:clr>
+        </p15:guide>
+      </p15:sldGuideLst>
+    </p:ext>
+  </p:extLst>
 </p:presentation>
 </file>
 
 <file path=ppt/slideLayouts/slideLayout1.xml><?xml version="1.0" encoding="utf-8"?>
 <p:sldLayout xmlns:a="http://schemas.openxmlformats.org/drawingml/2006/main" xmlns:r="http://schemas.openxmlformats.org/officeDocument/2006/relationships" xmlns:p="http://schemas.openxmlformats.org/presentationml/2006/main" type="title" preserve="1">
   <p:cSld name="Title Slide">
+    <p:bg>
+      <p:bgPr>
+        <a:solidFill>
+          <a:schemeClr val="accent2"/>
+        </a:solidFill>
+        <a:effectLst/>
+      </p:bgPr>
+    </p:bg>
     <p:spTree>
       <p:nvGrpSpPr>
         <p:cNvPr id="1" name=""/>
@@ -150,146 +175,120 @@
             <p:ph type="ctrTitle"/>
           </p:nvPr>
         </p:nvSpPr>
+        <p:spPr bwMode="blackWhite">
+          <a:xfrm>
+            <a:off x="1102240" y="2386744"/>
+            <a:ext cx="6939520" cy="1645920"/>
+          </a:xfrm>
+          <a:solidFill>
+            <a:srgbClr val="FFFFFF"/>
+          </a:solidFill>
+          <a:ln w="38100">
+            <a:solidFill>
+              <a:srgbClr val="404040"/>
+            </a:solidFill>
+          </a:ln>
+        </p:spPr>
+        <p:txBody>
+          <a:bodyPr lIns="274320" rIns="274320" anchor="ctr" anchorCtr="1">
+            <a:normAutofit/>
+          </a:bodyPr>
+          <a:lstStyle>
+            <a:lvl1pPr algn="ctr">
+              <a:defRPr sz="3500">
+                <a:solidFill>
+                  <a:srgbClr val="262626"/>
+                </a:solidFill>
+              </a:defRPr>
+            </a:lvl1pPr>
+          </a:lstStyle>
+          <a:p>
+            <a:r>
+              <a:rPr lang="en-US"/>
+              <a:t>Click to edit Master title style</a:t>
+            </a:r>
+            <a:endParaRPr lang="en-US" dirty="0"/>
+          </a:p>
+        </p:txBody>
+      </p:sp>
+      <p:sp>
+        <p:nvSpPr>
+          <p:cNvPr id="3" name="Subtitle 2"/>
+          <p:cNvSpPr>
+            <a:spLocks noGrp="1"/>
+          </p:cNvSpPr>
+          <p:nvPr>
+            <p:ph type="subTitle" idx="1"/>
+          </p:nvPr>
+        </p:nvSpPr>
         <p:spPr>
           <a:xfrm>
-            <a:off x="685800" y="2130425"/>
-            <a:ext cx="7772400" cy="1470025"/>
+            <a:off x="2021396" y="4352544"/>
+            <a:ext cx="5101209" cy="1239894"/>
           </a:xfrm>
+          <a:noFill/>
         </p:spPr>
         <p:txBody>
-          <a:bodyPr/>
-          <a:lstStyle/>
-          <a:p>
-            <a:r>
-              <a:rPr lang="en-US" smtClean="0"/>
-              <a:t>Click to edit Master title style</a:t>
-            </a:r>
-            <a:endParaRPr lang="en-US"/>
-          </a:p>
-        </p:txBody>
-      </p:sp>
-      <p:sp>
-        <p:nvSpPr>
-          <p:cNvPr id="3" name="Subtitle 2"/>
-          <p:cNvSpPr>
-            <a:spLocks noGrp="1"/>
-          </p:cNvSpPr>
-          <p:nvPr>
-            <p:ph type="subTitle" idx="1"/>
-          </p:nvPr>
-        </p:nvSpPr>
-        <p:spPr>
-          <a:xfrm>
-            <a:off x="1371600" y="3886200"/>
-            <a:ext cx="6400800" cy="1752600"/>
-          </a:xfrm>
-        </p:spPr>
-        <p:txBody>
-          <a:bodyPr/>
+          <a:bodyPr>
+            <a:normAutofit/>
+          </a:bodyPr>
           <a:lstStyle>
             <a:lvl1pPr marL="0" indent="0" algn="ctr">
               <a:buNone/>
-              <a:defRPr>
+              <a:defRPr sz="1900">
                 <a:solidFill>
                   <a:schemeClr val="tx1">
-                    <a:tint val="75000"/>
+                    <a:lumMod val="75000"/>
+                    <a:lumOff val="25000"/>
                   </a:schemeClr>
                 </a:solidFill>
               </a:defRPr>
             </a:lvl1pPr>
             <a:lvl2pPr marL="457200" indent="0" algn="ctr">
               <a:buNone/>
-              <a:defRPr>
-                <a:solidFill>
-                  <a:schemeClr val="tx1">
-                    <a:tint val="75000"/>
-                  </a:schemeClr>
-                </a:solidFill>
-              </a:defRPr>
+              <a:defRPr sz="1900"/>
             </a:lvl2pPr>
             <a:lvl3pPr marL="914400" indent="0" algn="ctr">
               <a:buNone/>
-              <a:defRPr>
-                <a:solidFill>
-                  <a:schemeClr val="tx1">
-                    <a:tint val="75000"/>
-                  </a:schemeClr>
-                </a:solidFill>
-              </a:defRPr>
+              <a:defRPr sz="1800"/>
             </a:lvl3pPr>
             <a:lvl4pPr marL="1371600" indent="0" algn="ctr">
               <a:buNone/>
-              <a:defRPr>
-                <a:solidFill>
-                  <a:schemeClr val="tx1">
-                    <a:tint val="75000"/>
-                  </a:schemeClr>
-                </a:solidFill>
-              </a:defRPr>
+              <a:defRPr sz="1600"/>
             </a:lvl4pPr>
             <a:lvl5pPr marL="1828800" indent="0" algn="ctr">
               <a:buNone/>
-              <a:defRPr>
-                <a:solidFill>
-                  <a:schemeClr val="tx1">
-                    <a:tint val="75000"/>
-                  </a:schemeClr>
-                </a:solidFill>
-              </a:defRPr>
+              <a:defRPr sz="1600"/>
             </a:lvl5pPr>
             <a:lvl6pPr marL="2286000" indent="0" algn="ctr">
               <a:buNone/>
-              <a:defRPr>
-                <a:solidFill>
-                  <a:schemeClr val="tx1">
-                    <a:tint val="75000"/>
-                  </a:schemeClr>
-                </a:solidFill>
-              </a:defRPr>
+              <a:defRPr sz="1600"/>
             </a:lvl6pPr>
             <a:lvl7pPr marL="2743200" indent="0" algn="ctr">
               <a:buNone/>
-              <a:defRPr>
-                <a:solidFill>
-                  <a:schemeClr val="tx1">
-                    <a:tint val="75000"/>
-                  </a:schemeClr>
-                </a:solidFill>
-              </a:defRPr>
+              <a:defRPr sz="1600"/>
             </a:lvl7pPr>
             <a:lvl8pPr marL="3200400" indent="0" algn="ctr">
               <a:buNone/>
-              <a:defRPr>
-                <a:solidFill>
-                  <a:schemeClr val="tx1">
-                    <a:tint val="75000"/>
-                  </a:schemeClr>
-                </a:solidFill>
-              </a:defRPr>
+              <a:defRPr sz="1600"/>
             </a:lvl8pPr>
             <a:lvl9pPr marL="3657600" indent="0" algn="ctr">
               <a:buNone/>
-              <a:defRPr>
-                <a:solidFill>
-                  <a:schemeClr val="tx1">
-                    <a:tint val="75000"/>
-                  </a:schemeClr>
-                </a:solidFill>
-              </a:defRPr>
+              <a:defRPr sz="1600"/>
             </a:lvl9pPr>
           </a:lstStyle>
           <a:p>
             <a:r>
-              <a:rPr lang="en-US" smtClean="0"/>
+              <a:rPr lang="en-US"/>
               <a:t>Click to edit Master subtitle style</a:t>
             </a:r>
-            <a:endParaRPr lang="en-US"/>
-          </a:p>
-        </p:txBody>
-      </p:sp>
-      <p:sp>
-        <p:nvSpPr>
-          <p:cNvPr id="4" name="Date Placeholder 3"/>
+            <a:endParaRPr lang="en-US" dirty="0"/>
+          </a:p>
+        </p:txBody>
+      </p:sp>
+      <p:sp>
+        <p:nvSpPr>
+          <p:cNvPr id="7" name="Date Placeholder 6"/>
           <p:cNvSpPr>
             <a:spLocks noGrp="1"/>
           </p:cNvSpPr>
@@ -304,7 +303,7 @@
           <a:p>
             <a:fld id="{5BCAD085-E8A6-8845-BD4E-CB4CCA059FC4}" type="datetimeFigureOut">
               <a:rPr lang="en-US" smtClean="0"/>
-              <a:t>1/27/13</a:t>
+              <a:t>5/25/2025</a:t>
             </a:fld>
             <a:endParaRPr lang="en-US"/>
           </a:p>
@@ -312,7 +311,7 @@
       </p:sp>
       <p:sp>
         <p:nvSpPr>
-          <p:cNvPr id="5" name="Footer Placeholder 4"/>
+          <p:cNvPr id="8" name="Footer Placeholder 7"/>
           <p:cNvSpPr>
             <a:spLocks noGrp="1"/>
           </p:cNvSpPr>
@@ -331,7 +330,7 @@
       </p:sp>
       <p:sp>
         <p:nvSpPr>
-          <p:cNvPr id="6" name="Slide Number Placeholder 5"/>
+          <p:cNvPr id="9" name="Slide Number Placeholder 8"/>
           <p:cNvSpPr>
             <a:spLocks noGrp="1"/>
           </p:cNvSpPr>
@@ -355,12 +354,12 @@
     </p:spTree>
     <p:extLst>
       <p:ext uri="{BB962C8B-B14F-4D97-AF65-F5344CB8AC3E}">
-        <p14:creationId xmlns:p14="http://schemas.microsoft.com/office/powerpoint/2010/main" val="3168075583"/>
+        <p14:creationId xmlns:p14="http://schemas.microsoft.com/office/powerpoint/2010/main" val="1167376142"/>
       </p:ext>
     </p:extLst>
   </p:cSld>
   <p:clrMapOvr>
-    <a:masterClrMapping/>
+    <a:overrideClrMapping bg1="dk1" tx1="lt1" bg2="dk2" tx2="lt2" accent1="accent1" accent2="accent2" accent3="accent3" accent4="accent4" accent5="accent5" accent6="accent6" hlink="hlink" folHlink="folHlink"/>
   </p:clrMapOvr>
 </p:sldLayout>
 </file>
@@ -398,10 +397,10 @@
           <a:lstStyle/>
           <a:p>
             <a:r>
-              <a:rPr lang="en-US" smtClean="0"/>
+              <a:rPr lang="en-US"/>
               <a:t>Click to edit Master title style</a:t>
             </a:r>
-            <a:endParaRPr lang="en-US"/>
+            <a:endParaRPr lang="en-US" dirty="0"/>
           </a:p>
         </p:txBody>
       </p:sp>
@@ -422,38 +421,38 @@
           <a:p>
             <a:pPr lvl="0"/>
             <a:r>
-              <a:rPr lang="en-US" smtClean="0"/>
+              <a:rPr lang="en-US"/>
               <a:t>Click to edit Master text styles</a:t>
             </a:r>
           </a:p>
           <a:p>
             <a:pPr lvl="1"/>
             <a:r>
-              <a:rPr lang="en-US" smtClean="0"/>
+              <a:rPr lang="en-US"/>
               <a:t>Second level</a:t>
             </a:r>
           </a:p>
           <a:p>
             <a:pPr lvl="2"/>
             <a:r>
-              <a:rPr lang="en-US" smtClean="0"/>
+              <a:rPr lang="en-US"/>
               <a:t>Third level</a:t>
             </a:r>
           </a:p>
           <a:p>
             <a:pPr lvl="3"/>
             <a:r>
-              <a:rPr lang="en-US" smtClean="0"/>
+              <a:rPr lang="en-US"/>
               <a:t>Fourth level</a:t>
             </a:r>
           </a:p>
           <a:p>
             <a:pPr lvl="4"/>
             <a:r>
-              <a:rPr lang="en-US" smtClean="0"/>
+              <a:rPr lang="en-US"/>
               <a:t>Fifth level</a:t>
             </a:r>
-            <a:endParaRPr lang="en-US"/>
+            <a:endParaRPr lang="en-US" dirty="0"/>
           </a:p>
         </p:txBody>
       </p:sp>
@@ -474,7 +473,7 @@
           <a:p>
             <a:fld id="{5BCAD085-E8A6-8845-BD4E-CB4CCA059FC4}" type="datetimeFigureOut">
               <a:rPr lang="en-US" smtClean="0"/>
-              <a:t>1/27/13</a:t>
+              <a:t>5/25/2025</a:t>
             </a:fld>
             <a:endParaRPr lang="en-US"/>
           </a:p>
@@ -525,7 +524,7 @@
     </p:spTree>
     <p:extLst>
       <p:ext uri="{BB962C8B-B14F-4D97-AF65-F5344CB8AC3E}">
-        <p14:creationId xmlns:p14="http://schemas.microsoft.com/office/powerpoint/2010/main" val="2910927964"/>
+        <p14:creationId xmlns:p14="http://schemas.microsoft.com/office/powerpoint/2010/main" val="4197147333"/>
       </p:ext>
     </p:extLst>
   </p:cSld>
@@ -564,8 +563,8 @@
         </p:nvSpPr>
         <p:spPr>
           <a:xfrm>
-            <a:off x="6629400" y="274638"/>
-            <a:ext cx="2057400" cy="5851525"/>
+            <a:off x="6489834" y="937260"/>
+            <a:ext cx="1053966" cy="4983480"/>
           </a:xfrm>
         </p:spPr>
         <p:txBody>
@@ -573,10 +572,10 @@
           <a:lstStyle/>
           <a:p>
             <a:r>
-              <a:rPr lang="en-US" smtClean="0"/>
+              <a:rPr lang="en-US"/>
               <a:t>Click to edit Master title style</a:t>
             </a:r>
-            <a:endParaRPr lang="en-US"/>
+            <a:endParaRPr lang="en-US" dirty="0"/>
           </a:p>
         </p:txBody>
       </p:sp>
@@ -592,8 +591,8 @@
         </p:nvSpPr>
         <p:spPr>
           <a:xfrm>
-            <a:off x="457200" y="274638"/>
-            <a:ext cx="6019800" cy="5851525"/>
+            <a:off x="1606046" y="937260"/>
+            <a:ext cx="4716174" cy="4983480"/>
           </a:xfrm>
         </p:spPr>
         <p:txBody>
@@ -602,38 +601,38 @@
           <a:p>
             <a:pPr lvl="0"/>
             <a:r>
-              <a:rPr lang="en-US" smtClean="0"/>
+              <a:rPr lang="en-US"/>
               <a:t>Click to edit Master text styles</a:t>
             </a:r>
           </a:p>
           <a:p>
             <a:pPr lvl="1"/>
             <a:r>
-              <a:rPr lang="en-US" smtClean="0"/>
+              <a:rPr lang="en-US"/>
               <a:t>Second level</a:t>
             </a:r>
           </a:p>
           <a:p>
             <a:pPr lvl="2"/>
             <a:r>
-              <a:rPr lang="en-US" smtClean="0"/>
+              <a:rPr lang="en-US"/>
               <a:t>Third level</a:t>
             </a:r>
           </a:p>
           <a:p>
             <a:pPr lvl="3"/>
             <a:r>
-              <a:rPr lang="en-US" smtClean="0"/>
+              <a:rPr lang="en-US"/>
               <a:t>Fourth level</a:t>
             </a:r>
           </a:p>
           <a:p>
             <a:pPr lvl="4"/>
             <a:r>
-              <a:rPr lang="en-US" smtClean="0"/>
+              <a:rPr lang="en-US"/>
               <a:t>Fifth level</a:t>
             </a:r>
-            <a:endParaRPr lang="en-US"/>
+            <a:endParaRPr lang="en-US" dirty="0"/>
           </a:p>
         </p:txBody>
       </p:sp>
@@ -654,7 +653,7 @@
           <a:p>
             <a:fld id="{5BCAD085-E8A6-8845-BD4E-CB4CCA059FC4}" type="datetimeFigureOut">
               <a:rPr lang="en-US" smtClean="0"/>
-              <a:t>1/27/13</a:t>
+              <a:t>5/25/2025</a:t>
             </a:fld>
             <a:endParaRPr lang="en-US"/>
           </a:p>
@@ -705,7 +704,7 @@
     </p:spTree>
     <p:extLst>
       <p:ext uri="{BB962C8B-B14F-4D97-AF65-F5344CB8AC3E}">
-        <p14:creationId xmlns:p14="http://schemas.microsoft.com/office/powerpoint/2010/main" val="3612223792"/>
+        <p14:creationId xmlns:p14="http://schemas.microsoft.com/office/powerpoint/2010/main" val="1025307879"/>
       </p:ext>
     </p:extLst>
   </p:cSld>
@@ -748,10 +747,10 @@
           <a:lstStyle/>
           <a:p>
             <a:r>
-              <a:rPr lang="en-US" smtClean="0"/>
+              <a:rPr lang="en-US"/>
               <a:t>Click to edit Master title style</a:t>
             </a:r>
-            <a:endParaRPr lang="en-US"/>
+            <a:endParaRPr lang="en-US" dirty="0"/>
           </a:p>
         </p:txBody>
       </p:sp>
@@ -772,44 +771,44 @@
           <a:p>
             <a:pPr lvl="0"/>
             <a:r>
-              <a:rPr lang="en-US" smtClean="0"/>
+              <a:rPr lang="en-US"/>
               <a:t>Click to edit Master text styles</a:t>
             </a:r>
           </a:p>
           <a:p>
             <a:pPr lvl="1"/>
             <a:r>
-              <a:rPr lang="en-US" smtClean="0"/>
+              <a:rPr lang="en-US"/>
               <a:t>Second level</a:t>
             </a:r>
           </a:p>
           <a:p>
             <a:pPr lvl="2"/>
             <a:r>
-              <a:rPr lang="en-US" smtClean="0"/>
+              <a:rPr lang="en-US"/>
               <a:t>Third level</a:t>
             </a:r>
           </a:p>
           <a:p>
             <a:pPr lvl="3"/>
             <a:r>
-              <a:rPr lang="en-US" smtClean="0"/>
+              <a:rPr lang="en-US"/>
               <a:t>Fourth level</a:t>
             </a:r>
           </a:p>
           <a:p>
             <a:pPr lvl="4"/>
             <a:r>
-              <a:rPr lang="en-US" smtClean="0"/>
+              <a:rPr lang="en-US"/>
               <a:t>Fifth level</a:t>
             </a:r>
-            <a:endParaRPr lang="en-US"/>
-          </a:p>
-        </p:txBody>
-      </p:sp>
-      <p:sp>
-        <p:nvSpPr>
-          <p:cNvPr id="4" name="Date Placeholder 3"/>
+            <a:endParaRPr lang="en-US" dirty="0"/>
+          </a:p>
+        </p:txBody>
+      </p:sp>
+      <p:sp>
+        <p:nvSpPr>
+          <p:cNvPr id="7" name="Date Placeholder 6"/>
           <p:cNvSpPr>
             <a:spLocks noGrp="1"/>
           </p:cNvSpPr>
@@ -824,7 +823,7 @@
           <a:p>
             <a:fld id="{5BCAD085-E8A6-8845-BD4E-CB4CCA059FC4}" type="datetimeFigureOut">
               <a:rPr lang="en-US" smtClean="0"/>
-              <a:t>1/27/13</a:t>
+              <a:t>5/25/2025</a:t>
             </a:fld>
             <a:endParaRPr lang="en-US"/>
           </a:p>
@@ -832,7 +831,7 @@
       </p:sp>
       <p:sp>
         <p:nvSpPr>
-          <p:cNvPr id="5" name="Footer Placeholder 4"/>
+          <p:cNvPr id="8" name="Footer Placeholder 7"/>
           <p:cNvSpPr>
             <a:spLocks noGrp="1"/>
           </p:cNvSpPr>
@@ -851,7 +850,7 @@
       </p:sp>
       <p:sp>
         <p:nvSpPr>
-          <p:cNvPr id="6" name="Slide Number Placeholder 5"/>
+          <p:cNvPr id="9" name="Slide Number Placeholder 8"/>
           <p:cNvSpPr>
             <a:spLocks noGrp="1"/>
           </p:cNvSpPr>
@@ -875,7 +874,7 @@
     </p:spTree>
     <p:extLst>
       <p:ext uri="{BB962C8B-B14F-4D97-AF65-F5344CB8AC3E}">
-        <p14:creationId xmlns:p14="http://schemas.microsoft.com/office/powerpoint/2010/main" val="2614314258"/>
+        <p14:creationId xmlns:p14="http://schemas.microsoft.com/office/powerpoint/2010/main" val="1077186654"/>
       </p:ext>
     </p:extLst>
   </p:cSld>
@@ -888,6 +887,14 @@
 <file path=ppt/slideLayouts/slideLayout3.xml><?xml version="1.0" encoding="utf-8"?>
 <p:sldLayout xmlns:a="http://schemas.openxmlformats.org/drawingml/2006/main" xmlns:r="http://schemas.openxmlformats.org/officeDocument/2006/relationships" xmlns:p="http://schemas.openxmlformats.org/presentationml/2006/main" type="secHead" preserve="1">
   <p:cSld name="Section Header">
+    <p:bg>
+      <p:bgPr>
+        <a:solidFill>
+          <a:schemeClr val="accent1"/>
+        </a:solidFill>
+        <a:effectLst/>
+      </p:bgPr>
+    </p:bg>
     <p:spTree>
       <p:nvGrpSpPr>
         <p:cNvPr id="1" name=""/>
@@ -912,60 +919,74 @@
             <p:ph type="title"/>
           </p:nvPr>
         </p:nvSpPr>
+        <p:spPr bwMode="blackWhite">
+          <a:xfrm>
+            <a:off x="1106424" y="2386744"/>
+            <a:ext cx="6940296" cy="1645920"/>
+          </a:xfrm>
+          <a:solidFill>
+            <a:srgbClr val="FFFFFF"/>
+          </a:solidFill>
+          <a:ln w="38100">
+            <a:solidFill>
+              <a:srgbClr val="404040"/>
+            </a:solidFill>
+          </a:ln>
+        </p:spPr>
+        <p:txBody>
+          <a:bodyPr lIns="274320" rIns="274320" anchor="ctr" anchorCtr="1">
+            <a:normAutofit/>
+          </a:bodyPr>
+          <a:lstStyle>
+            <a:lvl1pPr>
+              <a:defRPr sz="3500">
+                <a:solidFill>
+                  <a:srgbClr val="262626"/>
+                </a:solidFill>
+              </a:defRPr>
+            </a:lvl1pPr>
+          </a:lstStyle>
+          <a:p>
+            <a:r>
+              <a:rPr lang="en-US"/>
+              <a:t>Click to edit Master title style</a:t>
+            </a:r>
+            <a:endParaRPr lang="en-US" dirty="0"/>
+          </a:p>
+        </p:txBody>
+      </p:sp>
+      <p:sp>
+        <p:nvSpPr>
+          <p:cNvPr id="3" name="Text Placeholder 2"/>
+          <p:cNvSpPr>
+            <a:spLocks noGrp="1"/>
+          </p:cNvSpPr>
+          <p:nvPr>
+            <p:ph type="body" idx="1"/>
+          </p:nvPr>
+        </p:nvSpPr>
         <p:spPr>
           <a:xfrm>
-            <a:off x="722313" y="4406900"/>
-            <a:ext cx="7772400" cy="1362075"/>
+            <a:off x="2021396" y="4352465"/>
+            <a:ext cx="5101209" cy="1265082"/>
           </a:xfrm>
         </p:spPr>
         <p:txBody>
-          <a:bodyPr anchor="t"/>
-          <a:lstStyle>
-            <a:lvl1pPr algn="l">
-              <a:defRPr sz="4000" b="1" cap="all"/>
-            </a:lvl1pPr>
-          </a:lstStyle>
-          <a:p>
-            <a:r>
-              <a:rPr lang="en-US" smtClean="0"/>
-              <a:t>Click to edit Master title style</a:t>
-            </a:r>
-            <a:endParaRPr lang="en-US"/>
-          </a:p>
-        </p:txBody>
-      </p:sp>
-      <p:sp>
-        <p:nvSpPr>
-          <p:cNvPr id="3" name="Text Placeholder 2"/>
-          <p:cNvSpPr>
-            <a:spLocks noGrp="1"/>
-          </p:cNvSpPr>
-          <p:nvPr>
-            <p:ph type="body" idx="1"/>
-          </p:nvPr>
-        </p:nvSpPr>
-        <p:spPr>
-          <a:xfrm>
-            <a:off x="722313" y="2906713"/>
-            <a:ext cx="7772400" cy="1500187"/>
-          </a:xfrm>
-        </p:spPr>
-        <p:txBody>
-          <a:bodyPr anchor="b"/>
+          <a:bodyPr anchor="t" anchorCtr="1">
+            <a:normAutofit/>
+          </a:bodyPr>
           <a:lstStyle>
             <a:lvl1pPr marL="0" indent="0">
               <a:buNone/>
-              <a:defRPr sz="2000">
+              <a:defRPr sz="1900">
                 <a:solidFill>
-                  <a:schemeClr val="tx1">
-                    <a:tint val="75000"/>
-                  </a:schemeClr>
+                  <a:schemeClr val="tx1"/>
                 </a:solidFill>
               </a:defRPr>
             </a:lvl1pPr>
             <a:lvl2pPr marL="457200" indent="0">
               <a:buNone/>
-              <a:defRPr sz="1800">
+              <a:defRPr sz="1900">
                 <a:solidFill>
                   <a:schemeClr val="tx1">
                     <a:tint val="75000"/>
@@ -975,7 +996,7 @@
             </a:lvl2pPr>
             <a:lvl3pPr marL="914400" indent="0">
               <a:buNone/>
-              <a:defRPr sz="1600">
+              <a:defRPr sz="1800">
                 <a:solidFill>
                   <a:schemeClr val="tx1">
                     <a:tint val="75000"/>
@@ -985,7 +1006,7 @@
             </a:lvl3pPr>
             <a:lvl4pPr marL="1371600" indent="0">
               <a:buNone/>
-              <a:defRPr sz="1400">
+              <a:defRPr sz="1600">
                 <a:solidFill>
                   <a:schemeClr val="tx1">
                     <a:tint val="75000"/>
@@ -995,7 +1016,7 @@
             </a:lvl4pPr>
             <a:lvl5pPr marL="1828800" indent="0">
               <a:buNone/>
-              <a:defRPr sz="1400">
+              <a:defRPr sz="1600">
                 <a:solidFill>
                   <a:schemeClr val="tx1">
                     <a:tint val="75000"/>
@@ -1005,7 +1026,7 @@
             </a:lvl5pPr>
             <a:lvl6pPr marL="2286000" indent="0">
               <a:buNone/>
-              <a:defRPr sz="1400">
+              <a:defRPr sz="1600">
                 <a:solidFill>
                   <a:schemeClr val="tx1">
                     <a:tint val="75000"/>
@@ -1015,7 +1036,7 @@
             </a:lvl6pPr>
             <a:lvl7pPr marL="2743200" indent="0">
               <a:buNone/>
-              <a:defRPr sz="1400">
+              <a:defRPr sz="1600">
                 <a:solidFill>
                   <a:schemeClr val="tx1">
                     <a:tint val="75000"/>
@@ -1025,7 +1046,7 @@
             </a:lvl7pPr>
             <a:lvl8pPr marL="3200400" indent="0">
               <a:buNone/>
-              <a:defRPr sz="1400">
+              <a:defRPr sz="1600">
                 <a:solidFill>
                   <a:schemeClr val="tx1">
                     <a:tint val="75000"/>
@@ -1035,7 +1056,7 @@
             </a:lvl8pPr>
             <a:lvl9pPr marL="3657600" indent="0">
               <a:buNone/>
-              <a:defRPr sz="1400">
+              <a:defRPr sz="1600">
                 <a:solidFill>
                   <a:schemeClr val="tx1">
                     <a:tint val="75000"/>
@@ -1047,7 +1068,7 @@
           <a:p>
             <a:pPr lvl="0"/>
             <a:r>
-              <a:rPr lang="en-US" smtClean="0"/>
+              <a:rPr lang="en-US"/>
               <a:t>Click to edit Master text styles</a:t>
             </a:r>
           </a:p>
@@ -1055,7 +1076,7 @@
       </p:sp>
       <p:sp>
         <p:nvSpPr>
-          <p:cNvPr id="4" name="Date Placeholder 3"/>
+          <p:cNvPr id="7" name="Date Placeholder 6"/>
           <p:cNvSpPr>
             <a:spLocks noGrp="1"/>
           </p:cNvSpPr>
@@ -1070,7 +1091,7 @@
           <a:p>
             <a:fld id="{5BCAD085-E8A6-8845-BD4E-CB4CCA059FC4}" type="datetimeFigureOut">
               <a:rPr lang="en-US" smtClean="0"/>
-              <a:t>1/27/13</a:t>
+              <a:t>5/25/2025</a:t>
             </a:fld>
             <a:endParaRPr lang="en-US"/>
           </a:p>
@@ -1078,7 +1099,7 @@
       </p:sp>
       <p:sp>
         <p:nvSpPr>
-          <p:cNvPr id="5" name="Footer Placeholder 4"/>
+          <p:cNvPr id="8" name="Footer Placeholder 7"/>
           <p:cNvSpPr>
             <a:spLocks noGrp="1"/>
           </p:cNvSpPr>
@@ -1097,7 +1118,7 @@
       </p:sp>
       <p:sp>
         <p:nvSpPr>
-          <p:cNvPr id="6" name="Slide Number Placeholder 5"/>
+          <p:cNvPr id="9" name="Slide Number Placeholder 8"/>
           <p:cNvSpPr>
             <a:spLocks noGrp="1"/>
           </p:cNvSpPr>
@@ -1121,12 +1142,12 @@
     </p:spTree>
     <p:extLst>
       <p:ext uri="{BB962C8B-B14F-4D97-AF65-F5344CB8AC3E}">
-        <p14:creationId xmlns:p14="http://schemas.microsoft.com/office/powerpoint/2010/main" val="960648375"/>
+        <p14:creationId xmlns:p14="http://schemas.microsoft.com/office/powerpoint/2010/main" val="4157638970"/>
       </p:ext>
     </p:extLst>
   </p:cSld>
   <p:clrMapOvr>
-    <a:masterClrMapping/>
+    <a:overrideClrMapping bg1="dk1" tx1="lt1" bg2="dk2" tx2="lt2" accent1="accent1" accent2="accent2" accent3="accent3" accent4="accent4" accent5="accent5" accent6="accent6" hlink="hlink" folHlink="folHlink"/>
   </p:clrMapOvr>
 </p:sldLayout>
 </file>
@@ -1164,10 +1185,10 @@
           <a:lstStyle/>
           <a:p>
             <a:r>
-              <a:rPr lang="en-US" smtClean="0"/>
+              <a:rPr lang="en-US"/>
               <a:t>Click to edit Master title style</a:t>
             </a:r>
-            <a:endParaRPr lang="en-US"/>
+            <a:endParaRPr lang="en-US" dirty="0"/>
           </a:p>
         </p:txBody>
       </p:sp>
@@ -1183,76 +1204,48 @@
         </p:nvSpPr>
         <p:spPr>
           <a:xfrm>
-            <a:off x="457200" y="1600200"/>
-            <a:ext cx="4038600" cy="4525963"/>
+            <a:off x="1102239" y="2638044"/>
+            <a:ext cx="3288023" cy="3101982"/>
           </a:xfrm>
         </p:spPr>
         <p:txBody>
           <a:bodyPr/>
-          <a:lstStyle>
-            <a:lvl1pPr>
-              <a:defRPr sz="2800"/>
-            </a:lvl1pPr>
-            <a:lvl2pPr>
-              <a:defRPr sz="2400"/>
-            </a:lvl2pPr>
-            <a:lvl3pPr>
-              <a:defRPr sz="2000"/>
-            </a:lvl3pPr>
-            <a:lvl4pPr>
-              <a:defRPr sz="1800"/>
-            </a:lvl4pPr>
-            <a:lvl5pPr>
-              <a:defRPr sz="1800"/>
-            </a:lvl5pPr>
-            <a:lvl6pPr>
-              <a:defRPr sz="1800"/>
-            </a:lvl6pPr>
-            <a:lvl7pPr>
-              <a:defRPr sz="1800"/>
-            </a:lvl7pPr>
-            <a:lvl8pPr>
-              <a:defRPr sz="1800"/>
-            </a:lvl8pPr>
-            <a:lvl9pPr>
-              <a:defRPr sz="1800"/>
-            </a:lvl9pPr>
-          </a:lstStyle>
+          <a:lstStyle/>
           <a:p>
             <a:pPr lvl="0"/>
             <a:r>
-              <a:rPr lang="en-US" smtClean="0"/>
+              <a:rPr lang="en-US"/>
               <a:t>Click to edit Master text styles</a:t>
             </a:r>
           </a:p>
           <a:p>
             <a:pPr lvl="1"/>
             <a:r>
-              <a:rPr lang="en-US" smtClean="0"/>
+              <a:rPr lang="en-US"/>
               <a:t>Second level</a:t>
             </a:r>
           </a:p>
           <a:p>
             <a:pPr lvl="2"/>
             <a:r>
-              <a:rPr lang="en-US" smtClean="0"/>
+              <a:rPr lang="en-US"/>
               <a:t>Third level</a:t>
             </a:r>
           </a:p>
           <a:p>
             <a:pPr lvl="3"/>
             <a:r>
-              <a:rPr lang="en-US" smtClean="0"/>
+              <a:rPr lang="en-US"/>
               <a:t>Fourth level</a:t>
             </a:r>
           </a:p>
           <a:p>
             <a:pPr lvl="4"/>
             <a:r>
-              <a:rPr lang="en-US" smtClean="0"/>
+              <a:rPr lang="en-US"/>
               <a:t>Fifth level</a:t>
             </a:r>
-            <a:endParaRPr lang="en-US"/>
+            <a:endParaRPr lang="en-US" dirty="0"/>
           </a:p>
         </p:txBody>
       </p:sp>
@@ -1268,82 +1261,54 @@
         </p:nvSpPr>
         <p:spPr>
           <a:xfrm>
-            <a:off x="4648200" y="1600200"/>
-            <a:ext cx="4038600" cy="4525963"/>
+            <a:off x="4753737" y="2638044"/>
+            <a:ext cx="3290516" cy="3101982"/>
           </a:xfrm>
         </p:spPr>
         <p:txBody>
           <a:bodyPr/>
-          <a:lstStyle>
-            <a:lvl1pPr>
-              <a:defRPr sz="2800"/>
-            </a:lvl1pPr>
-            <a:lvl2pPr>
-              <a:defRPr sz="2400"/>
-            </a:lvl2pPr>
-            <a:lvl3pPr>
-              <a:defRPr sz="2000"/>
-            </a:lvl3pPr>
-            <a:lvl4pPr>
-              <a:defRPr sz="1800"/>
-            </a:lvl4pPr>
-            <a:lvl5pPr>
-              <a:defRPr sz="1800"/>
-            </a:lvl5pPr>
-            <a:lvl6pPr>
-              <a:defRPr sz="1800"/>
-            </a:lvl6pPr>
-            <a:lvl7pPr>
-              <a:defRPr sz="1800"/>
-            </a:lvl7pPr>
-            <a:lvl8pPr>
-              <a:defRPr sz="1800"/>
-            </a:lvl8pPr>
-            <a:lvl9pPr>
-              <a:defRPr sz="1800"/>
-            </a:lvl9pPr>
-          </a:lstStyle>
+          <a:lstStyle/>
           <a:p>
             <a:pPr lvl="0"/>
             <a:r>
-              <a:rPr lang="en-US" smtClean="0"/>
+              <a:rPr lang="en-US"/>
               <a:t>Click to edit Master text styles</a:t>
             </a:r>
           </a:p>
           <a:p>
             <a:pPr lvl="1"/>
             <a:r>
-              <a:rPr lang="en-US" smtClean="0"/>
+              <a:rPr lang="en-US"/>
               <a:t>Second level</a:t>
             </a:r>
           </a:p>
           <a:p>
             <a:pPr lvl="2"/>
             <a:r>
-              <a:rPr lang="en-US" smtClean="0"/>
+              <a:rPr lang="en-US"/>
               <a:t>Third level</a:t>
             </a:r>
           </a:p>
           <a:p>
             <a:pPr lvl="3"/>
             <a:r>
-              <a:rPr lang="en-US" smtClean="0"/>
+              <a:rPr lang="en-US"/>
               <a:t>Fourth level</a:t>
             </a:r>
           </a:p>
           <a:p>
             <a:pPr lvl="4"/>
             <a:r>
-              <a:rPr lang="en-US" smtClean="0"/>
+              <a:rPr lang="en-US"/>
               <a:t>Fifth level</a:t>
             </a:r>
-            <a:endParaRPr lang="en-US"/>
-          </a:p>
-        </p:txBody>
-      </p:sp>
-      <p:sp>
-        <p:nvSpPr>
-          <p:cNvPr id="5" name="Date Placeholder 4"/>
+            <a:endParaRPr lang="en-US" dirty="0"/>
+          </a:p>
+        </p:txBody>
+      </p:sp>
+      <p:sp>
+        <p:nvSpPr>
+          <p:cNvPr id="8" name="Date Placeholder 7"/>
           <p:cNvSpPr>
             <a:spLocks noGrp="1"/>
           </p:cNvSpPr>
@@ -1358,7 +1323,7 @@
           <a:p>
             <a:fld id="{5BCAD085-E8A6-8845-BD4E-CB4CCA059FC4}" type="datetimeFigureOut">
               <a:rPr lang="en-US" smtClean="0"/>
-              <a:t>1/27/13</a:t>
+              <a:t>5/25/2025</a:t>
             </a:fld>
             <a:endParaRPr lang="en-US"/>
           </a:p>
@@ -1366,7 +1331,7 @@
       </p:sp>
       <p:sp>
         <p:nvSpPr>
-          <p:cNvPr id="6" name="Footer Placeholder 5"/>
+          <p:cNvPr id="9" name="Footer Placeholder 8"/>
           <p:cNvSpPr>
             <a:spLocks noGrp="1"/>
           </p:cNvSpPr>
@@ -1385,7 +1350,7 @@
       </p:sp>
       <p:sp>
         <p:nvSpPr>
-          <p:cNvPr id="7" name="Slide Number Placeholder 6"/>
+          <p:cNvPr id="10" name="Slide Number Placeholder 9"/>
           <p:cNvSpPr>
             <a:spLocks noGrp="1"/>
           </p:cNvSpPr>
@@ -1409,7 +1374,7 @@
     </p:spTree>
     <p:extLst>
       <p:ext uri="{BB962C8B-B14F-4D97-AF65-F5344CB8AC3E}">
-        <p14:creationId xmlns:p14="http://schemas.microsoft.com/office/powerpoint/2010/main" val="2782244947"/>
+        <p14:creationId xmlns:p14="http://schemas.microsoft.com/office/powerpoint/2010/main" val="3825499557"/>
       </p:ext>
     </p:extLst>
   </p:cSld>
@@ -1438,33 +1403,6 @@
       </p:grpSpPr>
       <p:sp>
         <p:nvSpPr>
-          <p:cNvPr id="2" name="Title 1"/>
-          <p:cNvSpPr>
-            <a:spLocks noGrp="1"/>
-          </p:cNvSpPr>
-          <p:nvPr>
-            <p:ph type="title"/>
-          </p:nvPr>
-        </p:nvSpPr>
-        <p:spPr/>
-        <p:txBody>
-          <a:bodyPr/>
-          <a:lstStyle>
-            <a:lvl1pPr>
-              <a:defRPr/>
-            </a:lvl1pPr>
-          </a:lstStyle>
-          <a:p>
-            <a:r>
-              <a:rPr lang="en-US" smtClean="0"/>
-              <a:t>Click to edit Master title style</a:t>
-            </a:r>
-            <a:endParaRPr lang="en-US"/>
-          </a:p>
-        </p:txBody>
-      </p:sp>
-      <p:sp>
-        <p:nvSpPr>
           <p:cNvPr id="3" name="Text Placeholder 2"/>
           <p:cNvSpPr>
             <a:spLocks noGrp="1"/>
@@ -1475,20 +1413,28 @@
         </p:nvSpPr>
         <p:spPr>
           <a:xfrm>
-            <a:off x="457200" y="1535113"/>
-            <a:ext cx="4040188" cy="639762"/>
+            <a:off x="1102239" y="2313434"/>
+            <a:ext cx="3288024" cy="704087"/>
           </a:xfrm>
         </p:spPr>
         <p:txBody>
-          <a:bodyPr anchor="b"/>
+          <a:bodyPr anchor="b" anchorCtr="1">
+            <a:normAutofit/>
+          </a:bodyPr>
           <a:lstStyle>
-            <a:lvl1pPr marL="0" indent="0">
-              <a:buNone/>
-              <a:defRPr sz="2400" b="1"/>
+            <a:lvl1pPr marL="0" indent="0" algn="ctr">
+              <a:buNone/>
+              <a:defRPr sz="1900" b="0" cap="all" spc="100" baseline="0">
+                <a:solidFill>
+                  <a:schemeClr val="accent2">
+                    <a:lumMod val="75000"/>
+                  </a:schemeClr>
+                </a:solidFill>
+              </a:defRPr>
             </a:lvl1pPr>
             <a:lvl2pPr marL="457200" indent="0">
               <a:buNone/>
-              <a:defRPr sz="2000" b="1"/>
+              <a:defRPr sz="1900" b="1"/>
             </a:lvl2pPr>
             <a:lvl3pPr marL="914400" indent="0">
               <a:buNone/>
@@ -1522,7 +1468,7 @@
           <a:p>
             <a:pPr lvl="0"/>
             <a:r>
-              <a:rPr lang="en-US" smtClean="0"/>
+              <a:rPr lang="en-US"/>
               <a:t>Click to edit Master text styles</a:t>
             </a:r>
           </a:p>
@@ -1540,105 +1486,146 @@
         </p:nvSpPr>
         <p:spPr>
           <a:xfrm>
-            <a:off x="457200" y="2174875"/>
-            <a:ext cx="4040188" cy="3951288"/>
+            <a:off x="1102239" y="3143250"/>
+            <a:ext cx="3288024" cy="2596776"/>
           </a:xfrm>
         </p:spPr>
         <p:txBody>
           <a:bodyPr/>
-          <a:lstStyle>
-            <a:lvl1pPr>
-              <a:defRPr sz="2400"/>
-            </a:lvl1pPr>
-            <a:lvl2pPr>
-              <a:defRPr sz="2000"/>
-            </a:lvl2pPr>
-            <a:lvl3pPr>
-              <a:defRPr sz="1800"/>
-            </a:lvl3pPr>
-            <a:lvl4pPr>
-              <a:defRPr sz="1600"/>
-            </a:lvl4pPr>
-            <a:lvl5pPr>
-              <a:defRPr sz="1600"/>
-            </a:lvl5pPr>
-            <a:lvl6pPr>
-              <a:defRPr sz="1600"/>
-            </a:lvl6pPr>
-            <a:lvl7pPr>
-              <a:defRPr sz="1600"/>
-            </a:lvl7pPr>
-            <a:lvl8pPr>
-              <a:defRPr sz="1600"/>
-            </a:lvl8pPr>
-            <a:lvl9pPr>
-              <a:defRPr sz="1600"/>
-            </a:lvl9pPr>
-          </a:lstStyle>
+          <a:lstStyle/>
           <a:p>
             <a:pPr lvl="0"/>
             <a:r>
-              <a:rPr lang="en-US" smtClean="0"/>
+              <a:rPr lang="en-US"/>
               <a:t>Click to edit Master text styles</a:t>
             </a:r>
           </a:p>
           <a:p>
             <a:pPr lvl="1"/>
             <a:r>
-              <a:rPr lang="en-US" smtClean="0"/>
+              <a:rPr lang="en-US"/>
               <a:t>Second level</a:t>
             </a:r>
           </a:p>
           <a:p>
             <a:pPr lvl="2"/>
             <a:r>
-              <a:rPr lang="en-US" smtClean="0"/>
+              <a:rPr lang="en-US"/>
               <a:t>Third level</a:t>
             </a:r>
           </a:p>
           <a:p>
             <a:pPr lvl="3"/>
             <a:r>
-              <a:rPr lang="en-US" smtClean="0"/>
+              <a:rPr lang="en-US"/>
               <a:t>Fourth level</a:t>
             </a:r>
           </a:p>
           <a:p>
             <a:pPr lvl="4"/>
             <a:r>
-              <a:rPr lang="en-US" smtClean="0"/>
+              <a:rPr lang="en-US"/>
               <a:t>Fifth level</a:t>
             </a:r>
-            <a:endParaRPr lang="en-US"/>
-          </a:p>
-        </p:txBody>
-      </p:sp>
-      <p:sp>
-        <p:nvSpPr>
-          <p:cNvPr id="5" name="Text Placeholder 4"/>
-          <p:cNvSpPr>
-            <a:spLocks noGrp="1"/>
-          </p:cNvSpPr>
-          <p:nvPr>
-            <p:ph type="body" sz="quarter" idx="3"/>
+            <a:endParaRPr lang="en-US" dirty="0"/>
+          </a:p>
+        </p:txBody>
+      </p:sp>
+      <p:sp>
+        <p:nvSpPr>
+          <p:cNvPr id="6" name="Content Placeholder 5"/>
+          <p:cNvSpPr>
+            <a:spLocks noGrp="1"/>
+          </p:cNvSpPr>
+          <p:nvPr>
+            <p:ph sz="quarter" idx="4"/>
           </p:nvPr>
         </p:nvSpPr>
         <p:spPr>
           <a:xfrm>
-            <a:off x="4645025" y="1535113"/>
-            <a:ext cx="4041775" cy="639762"/>
+            <a:off x="4753737" y="3143250"/>
+            <a:ext cx="3290516" cy="2596776"/>
           </a:xfrm>
         </p:spPr>
         <p:txBody>
-          <a:bodyPr anchor="b"/>
+          <a:bodyPr/>
           <a:lstStyle>
-            <a:lvl1pPr marL="0" indent="0">
-              <a:buNone/>
-              <a:defRPr sz="2400" b="1"/>
+            <a:lvl5pPr>
+              <a:defRPr/>
+            </a:lvl5pPr>
+          </a:lstStyle>
+          <a:p>
+            <a:pPr lvl="0"/>
+            <a:r>
+              <a:rPr lang="en-US"/>
+              <a:t>Click to edit Master text styles</a:t>
+            </a:r>
+          </a:p>
+          <a:p>
+            <a:pPr lvl="1"/>
+            <a:r>
+              <a:rPr lang="en-US"/>
+              <a:t>Second level</a:t>
+            </a:r>
+          </a:p>
+          <a:p>
+            <a:pPr lvl="2"/>
+            <a:r>
+              <a:rPr lang="en-US"/>
+              <a:t>Third level</a:t>
+            </a:r>
+          </a:p>
+          <a:p>
+            <a:pPr lvl="3"/>
+            <a:r>
+              <a:rPr lang="en-US"/>
+              <a:t>Fourth level</a:t>
+            </a:r>
+          </a:p>
+          <a:p>
+            <a:pPr lvl="4"/>
+            <a:r>
+              <a:rPr lang="en-US"/>
+              <a:t>Fifth level</a:t>
+            </a:r>
+            <a:endParaRPr lang="en-US" dirty="0"/>
+          </a:p>
+        </p:txBody>
+      </p:sp>
+      <p:sp>
+        <p:nvSpPr>
+          <p:cNvPr id="11" name="Text Placeholder 4"/>
+          <p:cNvSpPr>
+            <a:spLocks noGrp="1"/>
+          </p:cNvSpPr>
+          <p:nvPr>
+            <p:ph type="body" sz="quarter" idx="13"/>
+          </p:nvPr>
+        </p:nvSpPr>
+        <p:spPr>
+          <a:xfrm>
+            <a:off x="4753737" y="2313434"/>
+            <a:ext cx="3290516" cy="704087"/>
+          </a:xfrm>
+        </p:spPr>
+        <p:txBody>
+          <a:bodyPr anchor="b" anchorCtr="1">
+            <a:normAutofit/>
+          </a:bodyPr>
+          <a:lstStyle>
+            <a:lvl1pPr marL="0" indent="0" algn="ctr">
+              <a:buNone/>
+              <a:defRPr sz="1900" b="0" cap="all" spc="100" baseline="0">
+                <a:solidFill>
+                  <a:schemeClr val="accent2">
+                    <a:lumMod val="75000"/>
+                  </a:schemeClr>
+                </a:solidFill>
+              </a:defRPr>
             </a:lvl1pPr>
             <a:lvl2pPr marL="457200" indent="0">
               <a:buNone/>
-              <a:defRPr sz="2000" b="1"/>
+              <a:defRPr sz="1900" b="1"/>
             </a:lvl2pPr>
             <a:lvl3pPr marL="914400" indent="0">
               <a:buNone/>
@@ -1672,94 +1659,9 @@
           <a:p>
             <a:pPr lvl="0"/>
             <a:r>
-              <a:rPr lang="en-US" smtClean="0"/>
+              <a:rPr lang="en-US"/>
               <a:t>Click to edit Master text styles</a:t>
             </a:r>
-          </a:p>
-        </p:txBody>
-      </p:sp>
-      <p:sp>
-        <p:nvSpPr>
-          <p:cNvPr id="6" name="Content Placeholder 5"/>
-          <p:cNvSpPr>
-            <a:spLocks noGrp="1"/>
-          </p:cNvSpPr>
-          <p:nvPr>
-            <p:ph sz="quarter" idx="4"/>
-          </p:nvPr>
-        </p:nvSpPr>
-        <p:spPr>
-          <a:xfrm>
-            <a:off x="4645025" y="2174875"/>
-            <a:ext cx="4041775" cy="3951288"/>
-          </a:xfrm>
-        </p:spPr>
-        <p:txBody>
-          <a:bodyPr/>
-          <a:lstStyle>
-            <a:lvl1pPr>
-              <a:defRPr sz="2400"/>
-            </a:lvl1pPr>
-            <a:lvl2pPr>
-              <a:defRPr sz="2000"/>
-            </a:lvl2pPr>
-            <a:lvl3pPr>
-              <a:defRPr sz="1800"/>
-            </a:lvl3pPr>
-            <a:lvl4pPr>
-              <a:defRPr sz="1600"/>
-            </a:lvl4pPr>
-            <a:lvl5pPr>
-              <a:defRPr sz="1600"/>
-            </a:lvl5pPr>
-            <a:lvl6pPr>
-              <a:defRPr sz="1600"/>
-            </a:lvl6pPr>
-            <a:lvl7pPr>
-              <a:defRPr sz="1600"/>
-            </a:lvl7pPr>
-            <a:lvl8pPr>
-              <a:defRPr sz="1600"/>
-            </a:lvl8pPr>
-            <a:lvl9pPr>
-              <a:defRPr sz="1600"/>
-            </a:lvl9pPr>
-          </a:lstStyle>
-          <a:p>
-            <a:pPr lvl="0"/>
-            <a:r>
-              <a:rPr lang="en-US" smtClean="0"/>
-              <a:t>Click to edit Master text styles</a:t>
-            </a:r>
-          </a:p>
-          <a:p>
-            <a:pPr lvl="1"/>
-            <a:r>
-              <a:rPr lang="en-US" smtClean="0"/>
-              <a:t>Second level</a:t>
-            </a:r>
-          </a:p>
-          <a:p>
-            <a:pPr lvl="2"/>
-            <a:r>
-              <a:rPr lang="en-US" smtClean="0"/>
-              <a:t>Third level</a:t>
-            </a:r>
-          </a:p>
-          <a:p>
-            <a:pPr lvl="3"/>
-            <a:r>
-              <a:rPr lang="en-US" smtClean="0"/>
-              <a:t>Fourth level</a:t>
-            </a:r>
-          </a:p>
-          <a:p>
-            <a:pPr lvl="4"/>
-            <a:r>
-              <a:rPr lang="en-US" smtClean="0"/>
-              <a:t>Fifth level</a:t>
-            </a:r>
-            <a:endParaRPr lang="en-US"/>
           </a:p>
         </p:txBody>
       </p:sp>
@@ -1780,7 +1682,7 @@
           <a:p>
             <a:fld id="{5BCAD085-E8A6-8845-BD4E-CB4CCA059FC4}" type="datetimeFigureOut">
               <a:rPr lang="en-US" smtClean="0"/>
-              <a:t>1/27/13</a:t>
+              <a:t>5/25/2025</a:t>
             </a:fld>
             <a:endParaRPr lang="en-US"/>
           </a:p>
@@ -1828,10 +1730,33 @@
           </a:p>
         </p:txBody>
       </p:sp>
+      <p:sp>
+        <p:nvSpPr>
+          <p:cNvPr id="10" name="Title 9"/>
+          <p:cNvSpPr>
+            <a:spLocks noGrp="1"/>
+          </p:cNvSpPr>
+          <p:nvPr>
+            <p:ph type="title"/>
+          </p:nvPr>
+        </p:nvSpPr>
+        <p:spPr/>
+        <p:txBody>
+          <a:bodyPr/>
+          <a:lstStyle/>
+          <a:p>
+            <a:r>
+              <a:rPr lang="en-US"/>
+              <a:t>Click to edit Master title style</a:t>
+            </a:r>
+            <a:endParaRPr lang="en-US" dirty="0"/>
+          </a:p>
+        </p:txBody>
+      </p:sp>
     </p:spTree>
     <p:extLst>
       <p:ext uri="{BB962C8B-B14F-4D97-AF65-F5344CB8AC3E}">
-        <p14:creationId xmlns:p14="http://schemas.microsoft.com/office/powerpoint/2010/main" val="990158736"/>
+        <p14:creationId xmlns:p14="http://schemas.microsoft.com/office/powerpoint/2010/main" val="3165874284"/>
       </p:ext>
     </p:extLst>
   </p:cSld>
@@ -1874,10 +1799,10 @@
           <a:lstStyle/>
           <a:p>
             <a:r>
-              <a:rPr lang="en-US" smtClean="0"/>
+              <a:rPr lang="en-US"/>
               <a:t>Click to edit Master title style</a:t>
             </a:r>
-            <a:endParaRPr lang="en-US"/>
+            <a:endParaRPr lang="en-US" dirty="0"/>
           </a:p>
         </p:txBody>
       </p:sp>
@@ -1898,7 +1823,7 @@
           <a:p>
             <a:fld id="{5BCAD085-E8A6-8845-BD4E-CB4CCA059FC4}" type="datetimeFigureOut">
               <a:rPr lang="en-US" smtClean="0"/>
-              <a:t>1/27/13</a:t>
+              <a:t>5/25/2025</a:t>
             </a:fld>
             <a:endParaRPr lang="en-US"/>
           </a:p>
@@ -1949,7 +1874,7 @@
     </p:spTree>
     <p:extLst>
       <p:ext uri="{BB962C8B-B14F-4D97-AF65-F5344CB8AC3E}">
-        <p14:creationId xmlns:p14="http://schemas.microsoft.com/office/powerpoint/2010/main" val="727027711"/>
+        <p14:creationId xmlns:p14="http://schemas.microsoft.com/office/powerpoint/2010/main" val="1581310526"/>
       </p:ext>
     </p:extLst>
   </p:cSld>
@@ -1993,7 +1918,7 @@
           <a:p>
             <a:fld id="{5BCAD085-E8A6-8845-BD4E-CB4CCA059FC4}" type="datetimeFigureOut">
               <a:rPr lang="en-US" smtClean="0"/>
-              <a:t>1/27/13</a:t>
+              <a:t>5/25/2025</a:t>
             </a:fld>
             <a:endParaRPr lang="en-US"/>
           </a:p>
@@ -2044,7 +1969,7 @@
     </p:spTree>
     <p:extLst>
       <p:ext uri="{BB962C8B-B14F-4D97-AF65-F5344CB8AC3E}">
-        <p14:creationId xmlns:p14="http://schemas.microsoft.com/office/powerpoint/2010/main" val="1212999818"/>
+        <p14:creationId xmlns:p14="http://schemas.microsoft.com/office/powerpoint/2010/main" val="2754677899"/>
       </p:ext>
     </p:extLst>
   </p:cSld>
@@ -2073,231 +1998,328 @@
       </p:grpSpPr>
       <p:sp>
         <p:nvSpPr>
-          <p:cNvPr id="2" name="Title 1"/>
-          <p:cNvSpPr>
-            <a:spLocks noGrp="1"/>
-          </p:cNvSpPr>
-          <p:nvPr>
-            <p:ph type="title"/>
-          </p:nvPr>
+          <p:cNvPr id="26" name="Rectangle 25"/>
+          <p:cNvSpPr/>
+          <p:nvPr/>
         </p:nvSpPr>
         <p:spPr>
           <a:xfrm>
-            <a:off x="457200" y="273050"/>
-            <a:ext cx="3008313" cy="1162050"/>
+            <a:off x="0" y="0"/>
+            <a:ext cx="4572000" cy="6858000"/>
+          </a:xfrm>
+          <a:prstGeom prst="rect">
+            <a:avLst/>
+          </a:prstGeom>
+          <a:solidFill>
+            <a:schemeClr val="accent2"/>
+          </a:solidFill>
+          <a:ln>
+            <a:noFill/>
+          </a:ln>
+        </p:spPr>
+        <p:style>
+          <a:lnRef idx="2">
+            <a:schemeClr val="accent1">
+              <a:shade val="50000"/>
+            </a:schemeClr>
+          </a:lnRef>
+          <a:fillRef idx="1">
+            <a:schemeClr val="accent1"/>
+          </a:fillRef>
+          <a:effectRef idx="0">
+            <a:schemeClr val="accent1"/>
+          </a:effectRef>
+          <a:fontRef idx="minor">
+            <a:schemeClr val="lt1"/>
+          </a:fontRef>
+        </p:style>
+      </p:sp>
+      <p:sp>
+        <p:nvSpPr>
+          <p:cNvPr id="2" name="Title 1"/>
+          <p:cNvSpPr>
+            <a:spLocks noGrp="1"/>
+          </p:cNvSpPr>
+          <p:nvPr>
+            <p:ph type="title"/>
+          </p:nvPr>
+        </p:nvSpPr>
+        <p:spPr bwMode="blackWhite">
+          <a:xfrm>
+            <a:off x="640703" y="2243829"/>
+            <a:ext cx="3290594" cy="1141497"/>
+          </a:xfrm>
+          <a:solidFill>
+            <a:srgbClr val="FFFFFF"/>
+          </a:solidFill>
+          <a:ln>
+            <a:solidFill>
+              <a:srgbClr val="404040"/>
+            </a:solidFill>
+          </a:ln>
+        </p:spPr>
+        <p:txBody>
+          <a:bodyPr anchor="ctr" anchorCtr="1">
+            <a:normAutofit/>
+          </a:bodyPr>
+          <a:lstStyle>
+            <a:lvl1pPr>
+              <a:defRPr sz="2100">
+                <a:solidFill>
+                  <a:srgbClr val="262626"/>
+                </a:solidFill>
+              </a:defRPr>
+            </a:lvl1pPr>
+          </a:lstStyle>
+          <a:p>
+            <a:r>
+              <a:rPr lang="en-US"/>
+              <a:t>Click to edit Master title style</a:t>
+            </a:r>
+            <a:endParaRPr lang="en-US" dirty="0"/>
+          </a:p>
+        </p:txBody>
+      </p:sp>
+      <p:sp>
+        <p:nvSpPr>
+          <p:cNvPr id="3" name="Content Placeholder 2"/>
+          <p:cNvSpPr>
+            <a:spLocks noGrp="1"/>
+          </p:cNvSpPr>
+          <p:nvPr>
+            <p:ph idx="1"/>
+          </p:nvPr>
+        </p:nvSpPr>
+        <p:spPr>
+          <a:xfrm>
+            <a:off x="5052060" y="804672"/>
+            <a:ext cx="3611880" cy="5248656"/>
           </a:xfrm>
         </p:spPr>
         <p:txBody>
-          <a:bodyPr anchor="b"/>
+          <a:bodyPr>
+            <a:normAutofit/>
+          </a:bodyPr>
           <a:lstStyle>
-            <a:lvl1pPr algn="l">
-              <a:defRPr sz="2000" b="1"/>
+            <a:lvl1pPr>
+              <a:defRPr sz="1900">
+                <a:solidFill>
+                  <a:schemeClr val="tx1"/>
+                </a:solidFill>
+              </a:defRPr>
+            </a:lvl1pPr>
+            <a:lvl2pPr>
+              <a:defRPr sz="1600">
+                <a:solidFill>
+                  <a:schemeClr val="tx1"/>
+                </a:solidFill>
+              </a:defRPr>
+            </a:lvl2pPr>
+            <a:lvl3pPr>
+              <a:defRPr sz="1600">
+                <a:solidFill>
+                  <a:schemeClr val="tx1"/>
+                </a:solidFill>
+              </a:defRPr>
+            </a:lvl3pPr>
+            <a:lvl4pPr>
+              <a:defRPr sz="1600">
+                <a:solidFill>
+                  <a:schemeClr val="tx1"/>
+                </a:solidFill>
+              </a:defRPr>
+            </a:lvl4pPr>
+            <a:lvl5pPr>
+              <a:defRPr sz="1600">
+                <a:solidFill>
+                  <a:schemeClr val="tx1"/>
+                </a:solidFill>
+              </a:defRPr>
+            </a:lvl5pPr>
+            <a:lvl6pPr>
+              <a:defRPr sz="1600"/>
+            </a:lvl6pPr>
+            <a:lvl7pPr>
+              <a:defRPr sz="1600"/>
+            </a:lvl7pPr>
+            <a:lvl8pPr>
+              <a:defRPr sz="1600"/>
+            </a:lvl8pPr>
+            <a:lvl9pPr>
+              <a:defRPr sz="1600"/>
+            </a:lvl9pPr>
+          </a:lstStyle>
+          <a:p>
+            <a:pPr lvl="0"/>
+            <a:r>
+              <a:rPr lang="en-US"/>
+              <a:t>Click to edit Master text styles</a:t>
+            </a:r>
+          </a:p>
+          <a:p>
+            <a:pPr lvl="1"/>
+            <a:r>
+              <a:rPr lang="en-US"/>
+              <a:t>Second level</a:t>
+            </a:r>
+          </a:p>
+          <a:p>
+            <a:pPr lvl="2"/>
+            <a:r>
+              <a:rPr lang="en-US"/>
+              <a:t>Third level</a:t>
+            </a:r>
+          </a:p>
+          <a:p>
+            <a:pPr lvl="3"/>
+            <a:r>
+              <a:rPr lang="en-US"/>
+              <a:t>Fourth level</a:t>
+            </a:r>
+          </a:p>
+          <a:p>
+            <a:pPr lvl="4"/>
+            <a:r>
+              <a:rPr lang="en-US"/>
+              <a:t>Fifth level</a:t>
+            </a:r>
+            <a:endParaRPr lang="en-US" dirty="0"/>
+          </a:p>
+        </p:txBody>
+      </p:sp>
+      <p:sp>
+        <p:nvSpPr>
+          <p:cNvPr id="4" name="Text Placeholder 3"/>
+          <p:cNvSpPr>
+            <a:spLocks noGrp="1"/>
+          </p:cNvSpPr>
+          <p:nvPr>
+            <p:ph type="body" sz="half" idx="2"/>
+          </p:nvPr>
+        </p:nvSpPr>
+        <p:spPr>
+          <a:xfrm>
+            <a:off x="862965" y="3549918"/>
+            <a:ext cx="2846070" cy="2194036"/>
+          </a:xfrm>
+        </p:spPr>
+        <p:txBody>
+          <a:bodyPr anchor="t" anchorCtr="1">
+            <a:normAutofit/>
+          </a:bodyPr>
+          <a:lstStyle>
+            <a:lvl1pPr marL="0" indent="0" algn="ctr">
+              <a:buNone/>
+              <a:defRPr sz="1500">
+                <a:solidFill>
+                  <a:srgbClr val="FFFFFF"/>
+                </a:solidFill>
+              </a:defRPr>
+            </a:lvl1pPr>
+            <a:lvl2pPr marL="457200" indent="0">
+              <a:buNone/>
+              <a:defRPr sz="1400"/>
+            </a:lvl2pPr>
+            <a:lvl3pPr marL="914400" indent="0">
+              <a:buNone/>
+              <a:defRPr sz="1200"/>
+            </a:lvl3pPr>
+            <a:lvl4pPr marL="1371600" indent="0">
+              <a:buNone/>
+              <a:defRPr sz="1000"/>
+            </a:lvl4pPr>
+            <a:lvl5pPr marL="1828800" indent="0">
+              <a:buNone/>
+              <a:defRPr sz="1000"/>
+            </a:lvl5pPr>
+            <a:lvl6pPr marL="2286000" indent="0">
+              <a:buNone/>
+              <a:defRPr sz="1000"/>
+            </a:lvl6pPr>
+            <a:lvl7pPr marL="2743200" indent="0">
+              <a:buNone/>
+              <a:defRPr sz="1000"/>
+            </a:lvl7pPr>
+            <a:lvl8pPr marL="3200400" indent="0">
+              <a:buNone/>
+              <a:defRPr sz="1000"/>
+            </a:lvl8pPr>
+            <a:lvl9pPr marL="3657600" indent="0">
+              <a:buNone/>
+              <a:defRPr sz="1000"/>
+            </a:lvl9pPr>
+          </a:lstStyle>
+          <a:p>
+            <a:pPr lvl="0"/>
+            <a:r>
+              <a:rPr lang="en-US"/>
+              <a:t>Click to edit Master text styles</a:t>
+            </a:r>
+          </a:p>
+        </p:txBody>
+      </p:sp>
+      <p:sp>
+        <p:nvSpPr>
+          <p:cNvPr id="9" name="Date Placeholder 8"/>
+          <p:cNvSpPr>
+            <a:spLocks noGrp="1"/>
+          </p:cNvSpPr>
+          <p:nvPr>
+            <p:ph type="dt" sz="half" idx="10"/>
+          </p:nvPr>
+        </p:nvSpPr>
+        <p:spPr/>
+        <p:txBody>
+          <a:bodyPr/>
+          <a:lstStyle/>
+          <a:p>
+            <a:fld id="{5BCAD085-E8A6-8845-BD4E-CB4CCA059FC4}" type="datetimeFigureOut">
+              <a:rPr lang="en-US" smtClean="0"/>
+              <a:t>5/25/2025</a:t>
+            </a:fld>
+            <a:endParaRPr lang="en-US"/>
+          </a:p>
+        </p:txBody>
+      </p:sp>
+      <p:sp>
+        <p:nvSpPr>
+          <p:cNvPr id="10" name="Footer Placeholder 9"/>
+          <p:cNvSpPr>
+            <a:spLocks noGrp="1"/>
+          </p:cNvSpPr>
+          <p:nvPr>
+            <p:ph type="ftr" sz="quarter" idx="11"/>
+          </p:nvPr>
+        </p:nvSpPr>
+        <p:spPr>
+          <a:xfrm>
+            <a:off x="640703" y="6236208"/>
+            <a:ext cx="3806398" cy="320040"/>
+          </a:xfrm>
+        </p:spPr>
+        <p:txBody>
+          <a:bodyPr>
+            <a:normAutofit/>
+          </a:bodyPr>
+          <a:lstStyle>
+            <a:lvl1pPr>
+              <a:defRPr>
+                <a:solidFill>
+                  <a:srgbClr val="FFFFFF">
+                    <a:alpha val="70000"/>
+                  </a:srgbClr>
+                </a:solidFill>
+              </a:defRPr>
             </a:lvl1pPr>
           </a:lstStyle>
           <a:p>
-            <a:r>
-              <a:rPr lang="en-US" smtClean="0"/>
-              <a:t>Click to edit Master title style</a:t>
-            </a:r>
             <a:endParaRPr lang="en-US"/>
           </a:p>
         </p:txBody>
       </p:sp>
       <p:sp>
         <p:nvSpPr>
-          <p:cNvPr id="3" name="Content Placeholder 2"/>
-          <p:cNvSpPr>
-            <a:spLocks noGrp="1"/>
-          </p:cNvSpPr>
-          <p:nvPr>
-            <p:ph idx="1"/>
-          </p:nvPr>
-        </p:nvSpPr>
-        <p:spPr>
-          <a:xfrm>
-            <a:off x="3575050" y="273050"/>
-            <a:ext cx="5111750" cy="5853113"/>
-          </a:xfrm>
-        </p:spPr>
-        <p:txBody>
-          <a:bodyPr/>
-          <a:lstStyle>
-            <a:lvl1pPr>
-              <a:defRPr sz="3200"/>
-            </a:lvl1pPr>
-            <a:lvl2pPr>
-              <a:defRPr sz="2800"/>
-            </a:lvl2pPr>
-            <a:lvl3pPr>
-              <a:defRPr sz="2400"/>
-            </a:lvl3pPr>
-            <a:lvl4pPr>
-              <a:defRPr sz="2000"/>
-            </a:lvl4pPr>
-            <a:lvl5pPr>
-              <a:defRPr sz="2000"/>
-            </a:lvl5pPr>
-            <a:lvl6pPr>
-              <a:defRPr sz="2000"/>
-            </a:lvl6pPr>
-            <a:lvl7pPr>
-              <a:defRPr sz="2000"/>
-            </a:lvl7pPr>
-            <a:lvl8pPr>
-              <a:defRPr sz="2000"/>
-            </a:lvl8pPr>
-            <a:lvl9pPr>
-              <a:defRPr sz="2000"/>
-            </a:lvl9pPr>
-          </a:lstStyle>
-          <a:p>
-            <a:pPr lvl="0"/>
-            <a:r>
-              <a:rPr lang="en-US" smtClean="0"/>
-              <a:t>Click to edit Master text styles</a:t>
-            </a:r>
-          </a:p>
-          <a:p>
-            <a:pPr lvl="1"/>
-            <a:r>
-              <a:rPr lang="en-US" smtClean="0"/>
-              <a:t>Second level</a:t>
-            </a:r>
-          </a:p>
-          <a:p>
-            <a:pPr lvl="2"/>
-            <a:r>
-              <a:rPr lang="en-US" smtClean="0"/>
-              <a:t>Third level</a:t>
-            </a:r>
-          </a:p>
-          <a:p>
-            <a:pPr lvl="3"/>
-            <a:r>
-              <a:rPr lang="en-US" smtClean="0"/>
-              <a:t>Fourth level</a:t>
-            </a:r>
-          </a:p>
-          <a:p>
-            <a:pPr lvl="4"/>
-            <a:r>
-              <a:rPr lang="en-US" smtClean="0"/>
-              <a:t>Fifth level</a:t>
-            </a:r>
-            <a:endParaRPr lang="en-US"/>
-          </a:p>
-        </p:txBody>
-      </p:sp>
-      <p:sp>
-        <p:nvSpPr>
-          <p:cNvPr id="4" name="Text Placeholder 3"/>
-          <p:cNvSpPr>
-            <a:spLocks noGrp="1"/>
-          </p:cNvSpPr>
-          <p:nvPr>
-            <p:ph type="body" sz="half" idx="2"/>
-          </p:nvPr>
-        </p:nvSpPr>
-        <p:spPr>
-          <a:xfrm>
-            <a:off x="457200" y="1435100"/>
-            <a:ext cx="3008313" cy="4691063"/>
-          </a:xfrm>
-        </p:spPr>
-        <p:txBody>
-          <a:bodyPr/>
-          <a:lstStyle>
-            <a:lvl1pPr marL="0" indent="0">
-              <a:buNone/>
-              <a:defRPr sz="1400"/>
-            </a:lvl1pPr>
-            <a:lvl2pPr marL="457200" indent="0">
-              <a:buNone/>
-              <a:defRPr sz="1200"/>
-            </a:lvl2pPr>
-            <a:lvl3pPr marL="914400" indent="0">
-              <a:buNone/>
-              <a:defRPr sz="1000"/>
-            </a:lvl3pPr>
-            <a:lvl4pPr marL="1371600" indent="0">
-              <a:buNone/>
-              <a:defRPr sz="900"/>
-            </a:lvl4pPr>
-            <a:lvl5pPr marL="1828800" indent="0">
-              <a:buNone/>
-              <a:defRPr sz="900"/>
-            </a:lvl5pPr>
-            <a:lvl6pPr marL="2286000" indent="0">
-              <a:buNone/>
-              <a:defRPr sz="900"/>
-            </a:lvl6pPr>
-            <a:lvl7pPr marL="2743200" indent="0">
-              <a:buNone/>
-              <a:defRPr sz="900"/>
-            </a:lvl7pPr>
-            <a:lvl8pPr marL="3200400" indent="0">
-              <a:buNone/>
-              <a:defRPr sz="900"/>
-            </a:lvl8pPr>
-            <a:lvl9pPr marL="3657600" indent="0">
-              <a:buNone/>
-              <a:defRPr sz="900"/>
-            </a:lvl9pPr>
-          </a:lstStyle>
-          <a:p>
-            <a:pPr lvl="0"/>
-            <a:r>
-              <a:rPr lang="en-US" smtClean="0"/>
-              <a:t>Click to edit Master text styles</a:t>
-            </a:r>
-          </a:p>
-        </p:txBody>
-      </p:sp>
-      <p:sp>
-        <p:nvSpPr>
-          <p:cNvPr id="5" name="Date Placeholder 4"/>
-          <p:cNvSpPr>
-            <a:spLocks noGrp="1"/>
-          </p:cNvSpPr>
-          <p:nvPr>
-            <p:ph type="dt" sz="half" idx="10"/>
-          </p:nvPr>
-        </p:nvSpPr>
-        <p:spPr/>
-        <p:txBody>
-          <a:bodyPr/>
-          <a:lstStyle/>
-          <a:p>
-            <a:fld id="{5BCAD085-E8A6-8845-BD4E-CB4CCA059FC4}" type="datetimeFigureOut">
-              <a:rPr lang="en-US" smtClean="0"/>
-              <a:t>1/27/13</a:t>
-            </a:fld>
-            <a:endParaRPr lang="en-US"/>
-          </a:p>
-        </p:txBody>
-      </p:sp>
-      <p:sp>
-        <p:nvSpPr>
-          <p:cNvPr id="6" name="Footer Placeholder 5"/>
-          <p:cNvSpPr>
-            <a:spLocks noGrp="1"/>
-          </p:cNvSpPr>
-          <p:nvPr>
-            <p:ph type="ftr" sz="quarter" idx="11"/>
-          </p:nvPr>
-        </p:nvSpPr>
-        <p:spPr/>
-        <p:txBody>
-          <a:bodyPr/>
-          <a:lstStyle/>
-          <a:p>
-            <a:endParaRPr lang="en-US"/>
-          </a:p>
-        </p:txBody>
-      </p:sp>
-      <p:sp>
-        <p:nvSpPr>
-          <p:cNvPr id="7" name="Slide Number Placeholder 6"/>
+          <p:cNvPr id="11" name="Slide Number Placeholder 10"/>
           <p:cNvSpPr>
             <a:spLocks noGrp="1"/>
           </p:cNvSpPr>
@@ -2321,7 +2343,7 @@
     </p:spTree>
     <p:extLst>
       <p:ext uri="{BB962C8B-B14F-4D97-AF65-F5344CB8AC3E}">
-        <p14:creationId xmlns:p14="http://schemas.microsoft.com/office/powerpoint/2010/main" val="1840726560"/>
+        <p14:creationId xmlns:p14="http://schemas.microsoft.com/office/powerpoint/2010/main" val="448530170"/>
       </p:ext>
     </p:extLst>
   </p:cSld>
@@ -2350,33 +2372,85 @@
       </p:grpSpPr>
       <p:sp>
         <p:nvSpPr>
-          <p:cNvPr id="2" name="Title 1"/>
-          <p:cNvSpPr>
-            <a:spLocks noGrp="1"/>
-          </p:cNvSpPr>
-          <p:nvPr>
-            <p:ph type="title"/>
-          </p:nvPr>
+          <p:cNvPr id="18" name="Rectangle 17"/>
+          <p:cNvSpPr/>
+          <p:nvPr/>
         </p:nvSpPr>
         <p:spPr>
           <a:xfrm>
-            <a:off x="1792288" y="4800600"/>
-            <a:ext cx="5486400" cy="566738"/>
+            <a:off x="1" y="0"/>
+            <a:ext cx="4571999" cy="6858000"/>
           </a:xfrm>
+          <a:prstGeom prst="rect">
+            <a:avLst/>
+          </a:prstGeom>
+          <a:solidFill>
+            <a:schemeClr val="accent2"/>
+          </a:solidFill>
+          <a:ln>
+            <a:noFill/>
+          </a:ln>
         </p:spPr>
-        <p:txBody>
-          <a:bodyPr anchor="b"/>
+        <p:style>
+          <a:lnRef idx="2">
+            <a:schemeClr val="accent1">
+              <a:shade val="50000"/>
+            </a:schemeClr>
+          </a:lnRef>
+          <a:fillRef idx="1">
+            <a:schemeClr val="accent1"/>
+          </a:fillRef>
+          <a:effectRef idx="0">
+            <a:schemeClr val="accent1"/>
+          </a:effectRef>
+          <a:fontRef idx="minor">
+            <a:schemeClr val="lt1"/>
+          </a:fontRef>
+        </p:style>
+      </p:sp>
+      <p:sp>
+        <p:nvSpPr>
+          <p:cNvPr id="2" name="Title 1"/>
+          <p:cNvSpPr>
+            <a:spLocks noGrp="1"/>
+          </p:cNvSpPr>
+          <p:nvPr>
+            <p:ph type="title"/>
+          </p:nvPr>
+        </p:nvSpPr>
+        <p:spPr bwMode="blackWhite">
+          <a:xfrm>
+            <a:off x="640080" y="2243828"/>
+            <a:ext cx="3291840" cy="1143000"/>
+          </a:xfrm>
+          <a:solidFill>
+            <a:srgbClr val="FFFFFF"/>
+          </a:solidFill>
+          <a:ln>
+            <a:solidFill>
+              <a:srgbClr val="262626"/>
+            </a:solidFill>
+          </a:ln>
+        </p:spPr>
+        <p:txBody>
+          <a:bodyPr anchor="ctr" anchorCtr="1">
+            <a:noAutofit/>
+          </a:bodyPr>
           <a:lstStyle>
-            <a:lvl1pPr algn="l">
-              <a:defRPr sz="2000" b="1"/>
+            <a:lvl1pPr>
+              <a:defRPr sz="2100">
+                <a:solidFill>
+                  <a:srgbClr val="262626"/>
+                </a:solidFill>
+              </a:defRPr>
             </a:lvl1pPr>
           </a:lstStyle>
           <a:p>
             <a:r>
-              <a:rPr lang="en-US" smtClean="0"/>
+              <a:rPr lang="en-US"/>
               <a:t>Click to edit Master title style</a:t>
             </a:r>
-            <a:endParaRPr lang="en-US"/>
+            <a:endParaRPr lang="en-US" dirty="0"/>
           </a:p>
         </p:txBody>
       </p:sp>
@@ -2384,7 +2458,7 @@
         <p:nvSpPr>
           <p:cNvPr id="3" name="Picture Placeholder 2"/>
           <p:cNvSpPr>
-            <a:spLocks noGrp="1"/>
+            <a:spLocks noGrp="1" noChangeAspect="1"/>
           </p:cNvSpPr>
           <p:nvPr>
             <p:ph type="pic" idx="1"/>
@@ -2392,16 +2466,28 @@
         </p:nvSpPr>
         <p:spPr>
           <a:xfrm>
-            <a:off x="1792288" y="612775"/>
-            <a:ext cx="5486400" cy="4114800"/>
+            <a:off x="4572000" y="-42172"/>
+            <a:ext cx="4576573" cy="6858000"/>
           </a:xfrm>
+          <a:solidFill>
+            <a:schemeClr val="bg1">
+              <a:lumMod val="75000"/>
+            </a:schemeClr>
+          </a:solidFill>
         </p:spPr>
         <p:txBody>
-          <a:bodyPr/>
+          <a:bodyPr anchor="t"/>
           <a:lstStyle>
             <a:lvl1pPr marL="0" indent="0">
               <a:buNone/>
-              <a:defRPr sz="3200"/>
+              <a:defRPr sz="3200">
+                <a:solidFill>
+                  <a:schemeClr val="bg1">
+                    <a:lumMod val="85000"/>
+                    <a:lumOff val="15000"/>
+                  </a:schemeClr>
+                </a:solidFill>
+              </a:defRPr>
             </a:lvl1pPr>
             <a:lvl2pPr marL="457200" indent="0">
               <a:buNone/>
@@ -2437,7 +2523,11 @@
             </a:lvl9pPr>
           </a:lstStyle>
           <a:p>
-            <a:endParaRPr lang="en-US"/>
+            <a:r>
+              <a:rPr lang="en-US"/>
+              <a:t>Click icon to add picture</a:t>
+            </a:r>
+            <a:endParaRPr lang="en-US" dirty="0"/>
           </a:p>
         </p:txBody>
       </p:sp>
@@ -2453,54 +2543,60 @@
         </p:nvSpPr>
         <p:spPr>
           <a:xfrm>
-            <a:off x="1792288" y="5367338"/>
-            <a:ext cx="5486400" cy="804862"/>
+            <a:off x="862965" y="3549919"/>
+            <a:ext cx="2846070" cy="2194037"/>
           </a:xfrm>
         </p:spPr>
         <p:txBody>
-          <a:bodyPr/>
+          <a:bodyPr anchor="t" anchorCtr="1">
+            <a:normAutofit/>
+          </a:bodyPr>
           <a:lstStyle>
-            <a:lvl1pPr marL="0" indent="0">
-              <a:buNone/>
-              <a:defRPr sz="1400"/>
+            <a:lvl1pPr marL="0" indent="0" algn="ctr">
+              <a:buNone/>
+              <a:defRPr sz="1500">
+                <a:solidFill>
+                  <a:srgbClr val="FFFFFF"/>
+                </a:solidFill>
+              </a:defRPr>
             </a:lvl1pPr>
             <a:lvl2pPr marL="457200" indent="0">
               <a:buNone/>
-              <a:defRPr sz="1200"/>
+              <a:defRPr sz="1400"/>
             </a:lvl2pPr>
             <a:lvl3pPr marL="914400" indent="0">
               <a:buNone/>
-              <a:defRPr sz="1000"/>
+              <a:defRPr sz="1200"/>
             </a:lvl3pPr>
             <a:lvl4pPr marL="1371600" indent="0">
               <a:buNone/>
-              <a:defRPr sz="900"/>
+              <a:defRPr sz="1000"/>
             </a:lvl4pPr>
             <a:lvl5pPr marL="1828800" indent="0">
               <a:buNone/>
-              <a:defRPr sz="900"/>
+              <a:defRPr sz="1000"/>
             </a:lvl5pPr>
             <a:lvl6pPr marL="2286000" indent="0">
               <a:buNone/>
-              <a:defRPr sz="900"/>
+              <a:defRPr sz="1000"/>
             </a:lvl6pPr>
             <a:lvl7pPr marL="2743200" indent="0">
               <a:buNone/>
-              <a:defRPr sz="900"/>
+              <a:defRPr sz="1000"/>
             </a:lvl7pPr>
             <a:lvl8pPr marL="3200400" indent="0">
               <a:buNone/>
-              <a:defRPr sz="900"/>
+              <a:defRPr sz="1000"/>
             </a:lvl8pPr>
             <a:lvl9pPr marL="3657600" indent="0">
               <a:buNone/>
-              <a:defRPr sz="900"/>
+              <a:defRPr sz="1000"/>
             </a:lvl9pPr>
           </a:lstStyle>
           <a:p>
             <a:pPr lvl="0"/>
             <a:r>
-              <a:rPr lang="en-US" smtClean="0"/>
+              <a:rPr lang="en-US"/>
               <a:t>Click to edit Master text styles</a:t>
             </a:r>
           </a:p>
@@ -2508,7 +2604,7 @@
       </p:sp>
       <p:sp>
         <p:nvSpPr>
-          <p:cNvPr id="5" name="Date Placeholder 4"/>
+          <p:cNvPr id="8" name="Date Placeholder 7"/>
           <p:cNvSpPr>
             <a:spLocks noGrp="1"/>
           </p:cNvSpPr>
@@ -2519,11 +2615,26 @@
         <p:spPr/>
         <p:txBody>
           <a:bodyPr/>
-          <a:lstStyle/>
+          <a:lstStyle>
+            <a:lvl1pPr>
+              <a:defRPr>
+                <a:solidFill>
+                  <a:srgbClr val="FFFFFF"/>
+                </a:solidFill>
+                <a:effectLst>
+                  <a:outerShdw blurRad="50800" dist="38100" dir="2700000" algn="tl" rotWithShape="0">
+                    <a:prstClr val="black">
+                      <a:alpha val="43000"/>
+                    </a:prstClr>
+                  </a:outerShdw>
+                </a:effectLst>
+              </a:defRPr>
+            </a:lvl1pPr>
+          </a:lstStyle>
           <a:p>
             <a:fld id="{5BCAD085-E8A6-8845-BD4E-CB4CCA059FC4}" type="datetimeFigureOut">
               <a:rPr lang="en-US" smtClean="0"/>
-              <a:t>1/27/13</a:t>
+              <a:t>5/25/2025</a:t>
             </a:fld>
             <a:endParaRPr lang="en-US"/>
           </a:p>
@@ -2531,7 +2642,7 @@
       </p:sp>
       <p:sp>
         <p:nvSpPr>
-          <p:cNvPr id="6" name="Footer Placeholder 5"/>
+          <p:cNvPr id="9" name="Footer Placeholder 8"/>
           <p:cNvSpPr>
             <a:spLocks noGrp="1"/>
           </p:cNvSpPr>
@@ -2539,10 +2650,27 @@
             <p:ph type="ftr" sz="quarter" idx="11"/>
           </p:nvPr>
         </p:nvSpPr>
-        <p:spPr/>
-        <p:txBody>
-          <a:bodyPr/>
-          <a:lstStyle/>
+        <p:spPr>
+          <a:xfrm>
+            <a:off x="640080" y="6236208"/>
+            <a:ext cx="3803904" cy="320040"/>
+          </a:xfrm>
+        </p:spPr>
+        <p:txBody>
+          <a:bodyPr>
+            <a:normAutofit/>
+          </a:bodyPr>
+          <a:lstStyle>
+            <a:lvl1pPr>
+              <a:defRPr>
+                <a:solidFill>
+                  <a:srgbClr val="FFFFFF">
+                    <a:alpha val="70000"/>
+                  </a:srgbClr>
+                </a:solidFill>
+              </a:defRPr>
+            </a:lvl1pPr>
+          </a:lstStyle>
           <a:p>
             <a:endParaRPr lang="en-US"/>
           </a:p>
@@ -2550,7 +2678,7 @@
       </p:sp>
       <p:sp>
         <p:nvSpPr>
-          <p:cNvPr id="7" name="Slide Number Placeholder 6"/>
+          <p:cNvPr id="10" name="Slide Number Placeholder 9"/>
           <p:cNvSpPr>
             <a:spLocks noGrp="1"/>
           </p:cNvSpPr>
@@ -2574,7 +2702,7 @@
     </p:spTree>
     <p:extLst>
       <p:ext uri="{BB962C8B-B14F-4D97-AF65-F5344CB8AC3E}">
-        <p14:creationId xmlns:p14="http://schemas.microsoft.com/office/powerpoint/2010/main" val="3889236939"/>
+        <p14:creationId xmlns:p14="http://schemas.microsoft.com/office/powerpoint/2010/main" val="747554511"/>
       </p:ext>
     </p:extLst>
   </p:cSld>
@@ -2588,9 +2716,14 @@
 <p:sldMaster xmlns:a="http://schemas.openxmlformats.org/drawingml/2006/main" xmlns:r="http://schemas.openxmlformats.org/officeDocument/2006/relationships" xmlns:p="http://schemas.openxmlformats.org/presentationml/2006/main">
   <p:cSld>
     <p:bg>
-      <p:bgRef idx="1001">
-        <a:schemeClr val="bg1"/>
-      </p:bgRef>
+      <p:bgPr>
+        <a:solidFill>
+          <a:schemeClr val="bg1">
+            <a:lumMod val="95000"/>
+          </a:schemeClr>
+        </a:solidFill>
+        <a:effectLst/>
+      </p:bgPr>
     </p:bg>
     <p:spTree>
       <p:nvGrpSpPr>
@@ -2616,105 +2749,155 @@
             <p:ph type="title"/>
           </p:nvPr>
         </p:nvSpPr>
+        <p:spPr bwMode="black">
+          <a:xfrm>
+            <a:off x="1606045" y="964692"/>
+            <a:ext cx="5937755" cy="1188720"/>
+          </a:xfrm>
+          <a:prstGeom prst="rect">
+            <a:avLst/>
+          </a:prstGeom>
+          <a:solidFill>
+            <a:srgbClr val="FFFFFF"/>
+          </a:solidFill>
+          <a:ln w="31750" cap="sq">
+            <a:solidFill>
+              <a:srgbClr val="404040"/>
+            </a:solidFill>
+            <a:miter lim="800000"/>
+          </a:ln>
+        </p:spPr>
+        <p:txBody>
+          <a:bodyPr vert="horz" lIns="182880" tIns="182880" rIns="182880" bIns="182880" rtlCol="0" anchor="ctr">
+            <a:normAutofit/>
+          </a:bodyPr>
+          <a:lstStyle/>
+          <a:p>
+            <a:r>
+              <a:rPr lang="en-US"/>
+              <a:t>Click to edit Master title style</a:t>
+            </a:r>
+            <a:endParaRPr lang="en-US" dirty="0"/>
+          </a:p>
+        </p:txBody>
+      </p:sp>
+      <p:sp>
+        <p:nvSpPr>
+          <p:cNvPr id="3" name="Text Placeholder 2"/>
+          <p:cNvSpPr>
+            <a:spLocks noGrp="1"/>
+          </p:cNvSpPr>
+          <p:nvPr>
+            <p:ph type="body" idx="1"/>
+          </p:nvPr>
+        </p:nvSpPr>
         <p:spPr>
           <a:xfrm>
-            <a:off x="457200" y="274638"/>
-            <a:ext cx="8229600" cy="1143000"/>
+            <a:off x="1606045" y="2638045"/>
+            <a:ext cx="5937755" cy="3101983"/>
           </a:xfrm>
           <a:prstGeom prst="rect">
             <a:avLst/>
           </a:prstGeom>
         </p:spPr>
         <p:txBody>
-          <a:bodyPr vert="horz" lIns="91440" tIns="45720" rIns="91440" bIns="45720" rtlCol="0" anchor="ctr">
+          <a:bodyPr vert="horz" lIns="91440" tIns="45720" rIns="91440" bIns="45720" rtlCol="0">
             <a:normAutofit/>
           </a:bodyPr>
           <a:lstStyle/>
           <a:p>
-            <a:r>
-              <a:rPr lang="en-US" smtClean="0"/>
-              <a:t>Click to edit Master title style</a:t>
-            </a:r>
-            <a:endParaRPr lang="en-US"/>
-          </a:p>
-        </p:txBody>
-      </p:sp>
-      <p:sp>
-        <p:nvSpPr>
-          <p:cNvPr id="3" name="Text Placeholder 2"/>
-          <p:cNvSpPr>
-            <a:spLocks noGrp="1"/>
-          </p:cNvSpPr>
-          <p:nvPr>
-            <p:ph type="body" idx="1"/>
+            <a:pPr lvl="0"/>
+            <a:r>
+              <a:rPr lang="en-US"/>
+              <a:t>Click to edit Master text styles</a:t>
+            </a:r>
+          </a:p>
+          <a:p>
+            <a:pPr lvl="1"/>
+            <a:r>
+              <a:rPr lang="en-US"/>
+              <a:t>Second level</a:t>
+            </a:r>
+          </a:p>
+          <a:p>
+            <a:pPr lvl="2"/>
+            <a:r>
+              <a:rPr lang="en-US"/>
+              <a:t>Third level</a:t>
+            </a:r>
+          </a:p>
+          <a:p>
+            <a:pPr lvl="3"/>
+            <a:r>
+              <a:rPr lang="en-US"/>
+              <a:t>Fourth level</a:t>
+            </a:r>
+          </a:p>
+          <a:p>
+            <a:pPr lvl="4"/>
+            <a:r>
+              <a:rPr lang="en-US"/>
+              <a:t>Fifth level</a:t>
+            </a:r>
+            <a:endParaRPr lang="en-US" dirty="0"/>
+          </a:p>
+        </p:txBody>
+      </p:sp>
+      <p:sp>
+        <p:nvSpPr>
+          <p:cNvPr id="4" name="Date Placeholder 3"/>
+          <p:cNvSpPr>
+            <a:spLocks noGrp="1"/>
+          </p:cNvSpPr>
+          <p:nvPr>
+            <p:ph type="dt" sz="half" idx="2"/>
           </p:nvPr>
         </p:nvSpPr>
         <p:spPr>
           <a:xfrm>
-            <a:off x="457200" y="1600200"/>
-            <a:ext cx="8229600" cy="4525963"/>
+            <a:off x="5978943" y="6238816"/>
+            <a:ext cx="2065310" cy="323968"/>
           </a:xfrm>
           <a:prstGeom prst="rect">
             <a:avLst/>
           </a:prstGeom>
         </p:spPr>
         <p:txBody>
-          <a:bodyPr vert="horz" lIns="91440" tIns="45720" rIns="91440" bIns="45720" rtlCol="0">
-            <a:normAutofit/>
-          </a:bodyPr>
-          <a:lstStyle/>
-          <a:p>
-            <a:pPr lvl="0"/>
-            <a:r>
+          <a:bodyPr vert="horz" lIns="91440" tIns="45720" rIns="91440" bIns="45720" rtlCol="0" anchor="ctr"/>
+          <a:lstStyle>
+            <a:lvl1pPr algn="r">
+              <a:defRPr sz="1000">
+                <a:solidFill>
+                  <a:schemeClr val="tx1">
+                    <a:alpha val="70000"/>
+                  </a:schemeClr>
+                </a:solidFill>
+              </a:defRPr>
+            </a:lvl1pPr>
+          </a:lstStyle>
+          <a:p>
+            <a:fld id="{5BCAD085-E8A6-8845-BD4E-CB4CCA059FC4}" type="datetimeFigureOut">
               <a:rPr lang="en-US" smtClean="0"/>
-              <a:t>Click to edit Master text styles</a:t>
-            </a:r>
-          </a:p>
-          <a:p>
-            <a:pPr lvl="1"/>
-            <a:r>
-              <a:rPr lang="en-US" smtClean="0"/>
-              <a:t>Second level</a:t>
-            </a:r>
-          </a:p>
-          <a:p>
-            <a:pPr lvl="2"/>
-            <a:r>
-              <a:rPr lang="en-US" smtClean="0"/>
-              <a:t>Third level</a:t>
-            </a:r>
-          </a:p>
-          <a:p>
-            <a:pPr lvl="3"/>
-            <a:r>
-              <a:rPr lang="en-US" smtClean="0"/>
-              <a:t>Fourth level</a:t>
-            </a:r>
-          </a:p>
-          <a:p>
-            <a:pPr lvl="4"/>
-            <a:r>
-              <a:rPr lang="en-US" smtClean="0"/>
-              <a:t>Fifth level</a:t>
-            </a:r>
+              <a:t>5/25/2025</a:t>
+            </a:fld>
             <a:endParaRPr lang="en-US"/>
           </a:p>
         </p:txBody>
       </p:sp>
       <p:sp>
         <p:nvSpPr>
-          <p:cNvPr id="4" name="Date Placeholder 3"/>
-          <p:cNvSpPr>
-            <a:spLocks noGrp="1"/>
-          </p:cNvSpPr>
-          <p:nvPr>
-            <p:ph type="dt" sz="half" idx="2"/>
+          <p:cNvPr id="5" name="Footer Placeholder 4"/>
+          <p:cNvSpPr>
+            <a:spLocks noGrp="1"/>
+          </p:cNvSpPr>
+          <p:nvPr>
+            <p:ph type="ftr" sz="quarter" idx="3"/>
           </p:nvPr>
         </p:nvSpPr>
         <p:spPr>
           <a:xfrm>
-            <a:off x="457200" y="6356350"/>
-            <a:ext cx="2133600" cy="365125"/>
+            <a:off x="1102239" y="6236208"/>
+            <a:ext cx="4556664" cy="320040"/>
           </a:xfrm>
           <a:prstGeom prst="rect">
             <a:avLst/>
@@ -2724,89 +2907,53 @@
           <a:bodyPr vert="horz" lIns="91440" tIns="45720" rIns="91440" bIns="45720" rtlCol="0" anchor="ctr"/>
           <a:lstStyle>
             <a:lvl1pPr algn="l">
-              <a:defRPr sz="1200">
+              <a:defRPr sz="1000">
                 <a:solidFill>
                   <a:schemeClr val="tx1">
-                    <a:tint val="75000"/>
+                    <a:alpha val="70000"/>
                   </a:schemeClr>
                 </a:solidFill>
               </a:defRPr>
             </a:lvl1pPr>
           </a:lstStyle>
           <a:p>
-            <a:fld id="{5BCAD085-E8A6-8845-BD4E-CB4CCA059FC4}" type="datetimeFigureOut">
-              <a:rPr lang="en-US" smtClean="0"/>
-              <a:t>1/27/13</a:t>
-            </a:fld>
             <a:endParaRPr lang="en-US"/>
           </a:p>
         </p:txBody>
       </p:sp>
       <p:sp>
         <p:nvSpPr>
-          <p:cNvPr id="5" name="Footer Placeholder 4"/>
-          <p:cNvSpPr>
-            <a:spLocks noGrp="1"/>
-          </p:cNvSpPr>
-          <p:nvPr>
-            <p:ph type="ftr" sz="quarter" idx="3"/>
+          <p:cNvPr id="6" name="Slide Number Placeholder 5"/>
+          <p:cNvSpPr>
+            <a:spLocks noGrp="1"/>
+          </p:cNvSpPr>
+          <p:nvPr>
+            <p:ph type="sldNum" sz="quarter" idx="4"/>
           </p:nvPr>
         </p:nvSpPr>
         <p:spPr>
           <a:xfrm>
-            <a:off x="3124200" y="6356350"/>
-            <a:ext cx="2895600" cy="365125"/>
+            <a:off x="8240112" y="6217920"/>
+            <a:ext cx="365760" cy="365760"/>
           </a:xfrm>
-          <a:prstGeom prst="rect">
+          <a:prstGeom prst="ellipse">
             <a:avLst/>
           </a:prstGeom>
+          <a:solidFill>
+            <a:srgbClr val="1D1D1D">
+              <a:alpha val="69804"/>
+            </a:srgbClr>
+          </a:solidFill>
         </p:spPr>
         <p:txBody>
-          <a:bodyPr vert="horz" lIns="91440" tIns="45720" rIns="91440" bIns="45720" rtlCol="0" anchor="ctr"/>
+          <a:bodyPr vert="horz" lIns="18288" tIns="45720" rIns="18288" bIns="45720" rtlCol="0" anchor="ctr">
+            <a:noAutofit/>
+          </a:bodyPr>
           <a:lstStyle>
             <a:lvl1pPr algn="ctr">
-              <a:defRPr sz="1200">
+              <a:defRPr sz="1100" spc="0" baseline="0">
                 <a:solidFill>
-                  <a:schemeClr val="tx1">
-                    <a:tint val="75000"/>
-                  </a:schemeClr>
-                </a:solidFill>
-              </a:defRPr>
-            </a:lvl1pPr>
-          </a:lstStyle>
-          <a:p>
-            <a:endParaRPr lang="en-US"/>
-          </a:p>
-        </p:txBody>
-      </p:sp>
-      <p:sp>
-        <p:nvSpPr>
-          <p:cNvPr id="6" name="Slide Number Placeholder 5"/>
-          <p:cNvSpPr>
-            <a:spLocks noGrp="1"/>
-          </p:cNvSpPr>
-          <p:nvPr>
-            <p:ph type="sldNum" sz="quarter" idx="4"/>
-          </p:nvPr>
-        </p:nvSpPr>
-        <p:spPr>
-          <a:xfrm>
-            <a:off x="6553200" y="6356350"/>
-            <a:ext cx="2133600" cy="365125"/>
-          </a:xfrm>
-          <a:prstGeom prst="rect">
-            <a:avLst/>
-          </a:prstGeom>
-        </p:spPr>
-        <p:txBody>
-          <a:bodyPr vert="horz" lIns="91440" tIns="45720" rIns="91440" bIns="45720" rtlCol="0" anchor="ctr"/>
-          <a:lstStyle>
-            <a:lvl1pPr algn="r">
-              <a:defRPr sz="1200">
-                <a:solidFill>
-                  <a:schemeClr val="tx1">
-                    <a:tint val="75000"/>
-                  </a:schemeClr>
+                  <a:srgbClr val="FFFFFF"/>
                 </a:solidFill>
               </a:defRPr>
             </a:lvl1pPr>
@@ -2823,34 +2970,37 @@
     </p:spTree>
     <p:extLst>
       <p:ext uri="{BB962C8B-B14F-4D97-AF65-F5344CB8AC3E}">
-        <p14:creationId xmlns:p14="http://schemas.microsoft.com/office/powerpoint/2010/main" val="2209977519"/>
+        <p14:creationId xmlns:p14="http://schemas.microsoft.com/office/powerpoint/2010/main" val="3947288847"/>
       </p:ext>
     </p:extLst>
   </p:cSld>
   <p:clrMap bg1="lt1" tx1="dk1" bg2="lt2" tx2="dk2" accent1="accent1" accent2="accent2" accent3="accent3" accent4="accent4" accent5="accent5" accent6="accent6" hlink="hlink" folHlink="folHlink"/>
   <p:sldLayoutIdLst>
-    <p:sldLayoutId id="2147483649" r:id="rId1"/>
-    <p:sldLayoutId id="2147483650" r:id="rId2"/>
-    <p:sldLayoutId id="2147483651" r:id="rId3"/>
-    <p:sldLayoutId id="2147483652" r:id="rId4"/>
-    <p:sldLayoutId id="2147483653" r:id="rId5"/>
-    <p:sldLayoutId id="2147483654" r:id="rId6"/>
-    <p:sldLayoutId id="2147483655" r:id="rId7"/>
-    <p:sldLayoutId id="2147483656" r:id="rId8"/>
-    <p:sldLayoutId id="2147483657" r:id="rId9"/>
-    <p:sldLayoutId id="2147483658" r:id="rId10"/>
-    <p:sldLayoutId id="2147483659" r:id="rId11"/>
+    <p:sldLayoutId id="2147483661" r:id="rId1"/>
+    <p:sldLayoutId id="2147483662" r:id="rId2"/>
+    <p:sldLayoutId id="2147483663" r:id="rId3"/>
+    <p:sldLayoutId id="2147483664" r:id="rId4"/>
+    <p:sldLayoutId id="2147483665" r:id="rId5"/>
+    <p:sldLayoutId id="2147483666" r:id="rId6"/>
+    <p:sldLayoutId id="2147483667" r:id="rId7"/>
+    <p:sldLayoutId id="2147483668" r:id="rId8"/>
+    <p:sldLayoutId id="2147483669" r:id="rId9"/>
+    <p:sldLayoutId id="2147483670" r:id="rId10"/>
+    <p:sldLayoutId id="2147483671" r:id="rId11"/>
   </p:sldLayoutIdLst>
   <p:txStyles>
     <p:titleStyle>
-      <a:lvl1pPr algn="ctr" defTabSz="457200" rtl="0" eaLnBrk="1" latinLnBrk="0" hangingPunct="1">
+      <a:lvl1pPr algn="ctr" defTabSz="914400" rtl="0" eaLnBrk="1" latinLnBrk="0" hangingPunct="1">
+        <a:lnSpc>
+          <a:spcPct val="90000"/>
+        </a:lnSpc>
         <a:spcBef>
           <a:spcPct val="0"/>
         </a:spcBef>
         <a:buNone/>
-        <a:defRPr sz="4400" kern="1200">
+        <a:defRPr sz="2600" kern="1200" cap="all" spc="200" baseline="0">
           <a:solidFill>
-            <a:schemeClr val="tx1"/>
+            <a:srgbClr val="262626"/>
           </a:solidFill>
           <a:latin typeface="+mj-lt"/>
           <a:ea typeface="+mj-ea"/>
@@ -2859,88 +3009,139 @@
       </a:lvl1pPr>
     </p:titleStyle>
     <p:bodyStyle>
-      <a:lvl1pPr marL="342900" indent="-342900" algn="l" defTabSz="457200" rtl="0" eaLnBrk="1" latinLnBrk="0" hangingPunct="1">
+      <a:lvl1pPr marL="228600" indent="-228600" algn="l" defTabSz="914400" rtl="0" eaLnBrk="1" latinLnBrk="0" hangingPunct="1">
+        <a:lnSpc>
+          <a:spcPct val="100000"/>
+        </a:lnSpc>
         <a:spcBef>
-          <a:spcPct val="20000"/>
+          <a:spcPts val="1000"/>
         </a:spcBef>
-        <a:buFont typeface="Arial"/>
+        <a:buClr>
+          <a:schemeClr val="accent2"/>
+        </a:buClr>
+        <a:buFont typeface="Arial" panose="020B0604020202020204" pitchFamily="34" charset="0"/>
         <a:buChar char="•"/>
-        <a:defRPr sz="3200" kern="1200">
+        <a:defRPr sz="1800" kern="1200">
           <a:solidFill>
-            <a:schemeClr val="tx1"/>
+            <a:schemeClr val="tx1">
+              <a:lumMod val="85000"/>
+              <a:lumOff val="15000"/>
+            </a:schemeClr>
           </a:solidFill>
           <a:latin typeface="+mn-lt"/>
           <a:ea typeface="+mn-ea"/>
           <a:cs typeface="+mn-cs"/>
         </a:defRPr>
       </a:lvl1pPr>
-      <a:lvl2pPr marL="742950" indent="-285750" algn="l" defTabSz="457200" rtl="0" eaLnBrk="1" latinLnBrk="0" hangingPunct="1">
+      <a:lvl2pPr marL="457200" indent="-228600" algn="l" defTabSz="914400" rtl="0" eaLnBrk="1" latinLnBrk="0" hangingPunct="1">
+        <a:lnSpc>
+          <a:spcPct val="100000"/>
+        </a:lnSpc>
         <a:spcBef>
-          <a:spcPct val="20000"/>
+          <a:spcPts val="1000"/>
         </a:spcBef>
-        <a:buFont typeface="Arial"/>
-        <a:buChar char="–"/>
-        <a:defRPr sz="2800" kern="1200">
+        <a:buClr>
+          <a:schemeClr val="accent2"/>
+        </a:buClr>
+        <a:buFont typeface="Arial" panose="020B0604020202020204" pitchFamily="34" charset="0"/>
+        <a:buChar char="•"/>
+        <a:defRPr sz="1600" kern="1200">
           <a:solidFill>
-            <a:schemeClr val="tx1"/>
+            <a:schemeClr val="tx1">
+              <a:lumMod val="85000"/>
+              <a:lumOff val="15000"/>
+            </a:schemeClr>
           </a:solidFill>
           <a:latin typeface="+mn-lt"/>
           <a:ea typeface="+mn-ea"/>
           <a:cs typeface="+mn-cs"/>
         </a:defRPr>
       </a:lvl2pPr>
-      <a:lvl3pPr marL="1143000" indent="-228600" algn="l" defTabSz="457200" rtl="0" eaLnBrk="1" latinLnBrk="0" hangingPunct="1">
+      <a:lvl3pPr marL="685800" indent="-228600" algn="l" defTabSz="914400" rtl="0" eaLnBrk="1" latinLnBrk="0" hangingPunct="1">
+        <a:lnSpc>
+          <a:spcPct val="100000"/>
+        </a:lnSpc>
         <a:spcBef>
-          <a:spcPct val="20000"/>
+          <a:spcPts val="1000"/>
         </a:spcBef>
-        <a:buFont typeface="Arial"/>
+        <a:buClr>
+          <a:schemeClr val="accent2"/>
+        </a:buClr>
+        <a:buFont typeface="Arial" panose="020B0604020202020204" pitchFamily="34" charset="0"/>
         <a:buChar char="•"/>
-        <a:defRPr sz="2400" kern="1200">
+        <a:defRPr sz="1600" kern="1200">
           <a:solidFill>
-            <a:schemeClr val="tx1"/>
+            <a:schemeClr val="tx1">
+              <a:lumMod val="85000"/>
+              <a:lumOff val="15000"/>
+            </a:schemeClr>
           </a:solidFill>
           <a:latin typeface="+mn-lt"/>
           <a:ea typeface="+mn-ea"/>
           <a:cs typeface="+mn-cs"/>
         </a:defRPr>
       </a:lvl3pPr>
-      <a:lvl4pPr marL="1600200" indent="-228600" algn="l" defTabSz="457200" rtl="0" eaLnBrk="1" latinLnBrk="0" hangingPunct="1">
+      <a:lvl4pPr marL="914400" indent="-228600" algn="l" defTabSz="914400" rtl="0" eaLnBrk="1" latinLnBrk="0" hangingPunct="1">
+        <a:lnSpc>
+          <a:spcPct val="100000"/>
+        </a:lnSpc>
         <a:spcBef>
-          <a:spcPct val="20000"/>
+          <a:spcPts val="1000"/>
         </a:spcBef>
-        <a:buFont typeface="Arial"/>
-        <a:buChar char="–"/>
-        <a:defRPr sz="2000" kern="1200">
+        <a:buClr>
+          <a:schemeClr val="accent2"/>
+        </a:buClr>
+        <a:buFont typeface="Arial" panose="020B0604020202020204" pitchFamily="34" charset="0"/>
+        <a:buChar char="•"/>
+        <a:defRPr sz="1600" kern="1200">
           <a:solidFill>
-            <a:schemeClr val="tx1"/>
+            <a:schemeClr val="tx1">
+              <a:lumMod val="85000"/>
+              <a:lumOff val="15000"/>
+            </a:schemeClr>
           </a:solidFill>
           <a:latin typeface="+mn-lt"/>
           <a:ea typeface="+mn-ea"/>
           <a:cs typeface="+mn-cs"/>
         </a:defRPr>
       </a:lvl4pPr>
-      <a:lvl5pPr marL="2057400" indent="-228600" algn="l" defTabSz="457200" rtl="0" eaLnBrk="1" latinLnBrk="0" hangingPunct="1">
+      <a:lvl5pPr marL="1143000" indent="-228600" algn="l" defTabSz="914400" rtl="0" eaLnBrk="1" latinLnBrk="0" hangingPunct="1">
+        <a:lnSpc>
+          <a:spcPct val="100000"/>
+        </a:lnSpc>
         <a:spcBef>
-          <a:spcPct val="20000"/>
+          <a:spcPts val="1000"/>
         </a:spcBef>
-        <a:buFont typeface="Arial"/>
-        <a:buChar char="»"/>
-        <a:defRPr sz="2000" kern="1200">
+        <a:buClr>
+          <a:schemeClr val="accent2"/>
+        </a:buClr>
+        <a:buFont typeface="Arial" panose="020B0604020202020204" pitchFamily="34" charset="0"/>
+        <a:buChar char="•"/>
+        <a:defRPr sz="1600" kern="1200">
           <a:solidFill>
-            <a:schemeClr val="tx1"/>
+            <a:schemeClr val="tx1">
+              <a:lumMod val="85000"/>
+              <a:lumOff val="15000"/>
+            </a:schemeClr>
           </a:solidFill>
           <a:latin typeface="+mn-lt"/>
           <a:ea typeface="+mn-ea"/>
           <a:cs typeface="+mn-cs"/>
         </a:defRPr>
       </a:lvl5pPr>
-      <a:lvl6pPr marL="2514600" indent="-228600" algn="l" defTabSz="457200" rtl="0" eaLnBrk="1" latinLnBrk="0" hangingPunct="1">
+      <a:lvl6pPr marL="1314450" indent="-228600" algn="l" defTabSz="914400" rtl="0" eaLnBrk="1" latinLnBrk="0" hangingPunct="1">
+        <a:lnSpc>
+          <a:spcPct val="100000"/>
+        </a:lnSpc>
         <a:spcBef>
-          <a:spcPct val="20000"/>
+          <a:spcPts val="1000"/>
         </a:spcBef>
-        <a:buFont typeface="Arial"/>
+        <a:buClr>
+          <a:schemeClr val="accent2"/>
+        </a:buClr>
+        <a:buFont typeface="Arial" panose="020B0604020202020204" pitchFamily="34" charset="0"/>
         <a:buChar char="•"/>
-        <a:defRPr sz="2000" kern="1200">
+        <a:defRPr sz="1600" kern="1200">
           <a:solidFill>
             <a:schemeClr val="tx1"/>
           </a:solidFill>
@@ -2949,13 +3150,19 @@
           <a:cs typeface="+mn-cs"/>
         </a:defRPr>
       </a:lvl6pPr>
-      <a:lvl7pPr marL="2971800" indent="-228600" algn="l" defTabSz="457200" rtl="0" eaLnBrk="1" latinLnBrk="0" hangingPunct="1">
+      <a:lvl7pPr marL="1485900" indent="-228600" algn="l" defTabSz="914400" rtl="0" eaLnBrk="1" latinLnBrk="0" hangingPunct="1">
+        <a:lnSpc>
+          <a:spcPct val="100000"/>
+        </a:lnSpc>
         <a:spcBef>
-          <a:spcPct val="20000"/>
+          <a:spcPts val="1000"/>
         </a:spcBef>
-        <a:buFont typeface="Arial"/>
+        <a:buClr>
+          <a:schemeClr val="accent2"/>
+        </a:buClr>
+        <a:buFont typeface="Arial" panose="020B0604020202020204" pitchFamily="34" charset="0"/>
         <a:buChar char="•"/>
-        <a:defRPr sz="2000" kern="1200">
+        <a:defRPr sz="1600" kern="1200">
           <a:solidFill>
             <a:schemeClr val="tx1"/>
           </a:solidFill>
@@ -2964,13 +3171,19 @@
           <a:cs typeface="+mn-cs"/>
         </a:defRPr>
       </a:lvl7pPr>
-      <a:lvl8pPr marL="3429000" indent="-228600" algn="l" defTabSz="457200" rtl="0" eaLnBrk="1" latinLnBrk="0" hangingPunct="1">
+      <a:lvl8pPr marL="1657350" indent="-228600" algn="l" defTabSz="914400" rtl="0" eaLnBrk="1" latinLnBrk="0" hangingPunct="1">
+        <a:lnSpc>
+          <a:spcPct val="100000"/>
+        </a:lnSpc>
         <a:spcBef>
-          <a:spcPct val="20000"/>
+          <a:spcPts val="1000"/>
         </a:spcBef>
-        <a:buFont typeface="Arial"/>
+        <a:buClr>
+          <a:schemeClr val="accent2"/>
+        </a:buClr>
+        <a:buFont typeface="Arial" panose="020B0604020202020204" pitchFamily="34" charset="0"/>
         <a:buChar char="•"/>
-        <a:defRPr sz="2000" kern="1200">
+        <a:defRPr sz="1600" kern="1200" baseline="0">
           <a:solidFill>
             <a:schemeClr val="tx1"/>
           </a:solidFill>
@@ -2979,13 +3192,19 @@
           <a:cs typeface="+mn-cs"/>
         </a:defRPr>
       </a:lvl8pPr>
-      <a:lvl9pPr marL="3886200" indent="-228600" algn="l" defTabSz="457200" rtl="0" eaLnBrk="1" latinLnBrk="0" hangingPunct="1">
+      <a:lvl9pPr marL="1828800" indent="-228600" algn="l" defTabSz="914400" rtl="0" eaLnBrk="1" latinLnBrk="0" hangingPunct="1">
+        <a:lnSpc>
+          <a:spcPct val="100000"/>
+        </a:lnSpc>
         <a:spcBef>
-          <a:spcPct val="20000"/>
+          <a:spcPts val="1000"/>
         </a:spcBef>
-        <a:buFont typeface="Arial"/>
+        <a:buClr>
+          <a:schemeClr val="accent2"/>
+        </a:buClr>
+        <a:buFont typeface="Arial" panose="020B0604020202020204" pitchFamily="34" charset="0"/>
         <a:buChar char="•"/>
-        <a:defRPr sz="2000" kern="1200">
+        <a:defRPr sz="1600" kern="1200" baseline="0">
           <a:solidFill>
             <a:schemeClr val="tx1"/>
           </a:solidFill>
@@ -2999,7 +3218,7 @@
       <a:defPPr>
         <a:defRPr lang="en-US"/>
       </a:defPPr>
-      <a:lvl1pPr marL="0" algn="l" defTabSz="457200" rtl="0" eaLnBrk="1" latinLnBrk="0" hangingPunct="1">
+      <a:lvl1pPr marL="0" algn="l" defTabSz="914400" rtl="0" eaLnBrk="1" latinLnBrk="0" hangingPunct="1">
         <a:defRPr sz="1800" kern="1200">
           <a:solidFill>
             <a:schemeClr val="tx1"/>
@@ -3009,7 +3228,7 @@
           <a:cs typeface="+mn-cs"/>
         </a:defRPr>
       </a:lvl1pPr>
-      <a:lvl2pPr marL="457200" algn="l" defTabSz="457200" rtl="0" eaLnBrk="1" latinLnBrk="0" hangingPunct="1">
+      <a:lvl2pPr marL="457200" algn="l" defTabSz="914400" rtl="0" eaLnBrk="1" latinLnBrk="0" hangingPunct="1">
         <a:defRPr sz="1800" kern="1200">
           <a:solidFill>
             <a:schemeClr val="tx1"/>
@@ -3019,7 +3238,7 @@
           <a:cs typeface="+mn-cs"/>
         </a:defRPr>
       </a:lvl2pPr>
-      <a:lvl3pPr marL="914400" algn="l" defTabSz="457200" rtl="0" eaLnBrk="1" latinLnBrk="0" hangingPunct="1">
+      <a:lvl3pPr marL="914400" algn="l" defTabSz="914400" rtl="0" eaLnBrk="1" latinLnBrk="0" hangingPunct="1">
         <a:defRPr sz="1800" kern="1200">
           <a:solidFill>
             <a:schemeClr val="tx1"/>
@@ -3029,7 +3248,7 @@
           <a:cs typeface="+mn-cs"/>
         </a:defRPr>
       </a:lvl3pPr>
-      <a:lvl4pPr marL="1371600" algn="l" defTabSz="457200" rtl="0" eaLnBrk="1" latinLnBrk="0" hangingPunct="1">
+      <a:lvl4pPr marL="1371600" algn="l" defTabSz="914400" rtl="0" eaLnBrk="1" latinLnBrk="0" hangingPunct="1">
         <a:defRPr sz="1800" kern="1200">
           <a:solidFill>
             <a:schemeClr val="tx1"/>
@@ -3039,7 +3258,7 @@
           <a:cs typeface="+mn-cs"/>
         </a:defRPr>
       </a:lvl4pPr>
-      <a:lvl5pPr marL="1828800" algn="l" defTabSz="457200" rtl="0" eaLnBrk="1" latinLnBrk="0" hangingPunct="1">
+      <a:lvl5pPr marL="1828800" algn="l" defTabSz="914400" rtl="0" eaLnBrk="1" latinLnBrk="0" hangingPunct="1">
         <a:defRPr sz="1800" kern="1200">
           <a:solidFill>
             <a:schemeClr val="tx1"/>
@@ -3049,7 +3268,7 @@
           <a:cs typeface="+mn-cs"/>
         </a:defRPr>
       </a:lvl5pPr>
-      <a:lvl6pPr marL="2286000" algn="l" defTabSz="457200" rtl="0" eaLnBrk="1" latinLnBrk="0" hangingPunct="1">
+      <a:lvl6pPr marL="2286000" algn="l" defTabSz="914400" rtl="0" eaLnBrk="1" latinLnBrk="0" hangingPunct="1">
         <a:defRPr sz="1800" kern="1200">
           <a:solidFill>
             <a:schemeClr val="tx1"/>
@@ -3059,7 +3278,7 @@
           <a:cs typeface="+mn-cs"/>
         </a:defRPr>
       </a:lvl6pPr>
-      <a:lvl7pPr marL="2743200" algn="l" defTabSz="457200" rtl="0" eaLnBrk="1" latinLnBrk="0" hangingPunct="1">
+      <a:lvl7pPr marL="2743200" algn="l" defTabSz="914400" rtl="0" eaLnBrk="1" latinLnBrk="0" hangingPunct="1">
         <a:defRPr sz="1800" kern="1200">
           <a:solidFill>
             <a:schemeClr val="tx1"/>
@@ -3069,7 +3288,7 @@
           <a:cs typeface="+mn-cs"/>
         </a:defRPr>
       </a:lvl7pPr>
-      <a:lvl8pPr marL="3200400" algn="l" defTabSz="457200" rtl="0" eaLnBrk="1" latinLnBrk="0" hangingPunct="1">
+      <a:lvl8pPr marL="3200400" algn="l" defTabSz="914400" rtl="0" eaLnBrk="1" latinLnBrk="0" hangingPunct="1">
         <a:defRPr sz="1800" kern="1200">
           <a:solidFill>
             <a:schemeClr val="tx1"/>
@@ -3079,7 +3298,7 @@
           <a:cs typeface="+mn-cs"/>
         </a:defRPr>
       </a:lvl8pPr>
-      <a:lvl9pPr marL="3657600" algn="l" defTabSz="457200" rtl="0" eaLnBrk="1" latinLnBrk="0" hangingPunct="1">
+      <a:lvl9pPr marL="3657600" algn="l" defTabSz="914400" rtl="0" eaLnBrk="1" latinLnBrk="0" hangingPunct="1">
         <a:defRPr sz="1800" kern="1200">
           <a:solidFill>
             <a:schemeClr val="tx1"/>
@@ -3095,7 +3314,7 @@
 </file>
 
 <file path=ppt/slides/slide1.xml><?xml version="1.0" encoding="utf-8"?>
-<p:sld xmlns:a="http://schemas.openxmlformats.org/drawingml/2006/main" xmlns:p="http://schemas.openxmlformats.org/presentationml/2006/main" xmlns:r="http://schemas.openxmlformats.org/officeDocument/2006/relationships">
+<p:sld xmlns:a="http://schemas.openxmlformats.org/drawingml/2006/main" xmlns:r="http://schemas.openxmlformats.org/officeDocument/2006/relationships" xmlns:p="http://schemas.openxmlformats.org/presentationml/2006/main">
   <p:cSld>
     <p:spTree>
       <p:nvGrpSpPr>
@@ -3103,7 +3322,14 @@
         <p:cNvGrpSpPr/>
         <p:nvPr/>
       </p:nvGrpSpPr>
-      <p:grpSpPr/>
+      <p:grpSpPr>
+        <a:xfrm>
+          <a:off x="0" y="0"/>
+          <a:ext cx="0" cy="0"/>
+          <a:chOff x="0" y="0"/>
+          <a:chExt cx="0" cy="0"/>
+        </a:xfrm>
+      </p:grpSpPr>
       <p:sp>
         <p:nvSpPr>
           <p:cNvPr id="2" name="Title 1"/>
@@ -3114,12 +3340,20 @@
             <p:ph type="title"/>
           </p:nvPr>
         </p:nvSpPr>
-        <p:spPr/>
-        <p:txBody>
-          <a:bodyPr/>
-          <a:lstStyle/>
-          <a:p>
-            <a:r>
+        <p:spPr>
+          <a:xfrm>
+            <a:off x="457200" y="1780462"/>
+            <a:ext cx="8229600" cy="1143000"/>
+          </a:xfrm>
+        </p:spPr>
+        <p:txBody>
+          <a:bodyPr>
+            <a:normAutofit/>
+          </a:bodyPr>
+          <a:lstStyle/>
+          <a:p>
+            <a:r>
+              <a:rPr dirty="0"/>
               <a:t>Brain Tumor Semantic Segmentation with 2D U-Net</a:t>
             </a:r>
           </a:p>
@@ -3127,7 +3361,13 @@
       </p:sp>
       <p:sp>
         <p:nvSpPr>
-          <p:cNvPr id="3" name="Content Placeholder 2"/>
+          <p:cNvPr id="5" name="Content Placeholder 4">
+            <a:extLst>
+              <a:ext uri="{FF2B5EF4-FFF2-40B4-BE49-F238E27FC236}">
+                <a16:creationId xmlns:a16="http://schemas.microsoft.com/office/drawing/2014/main" id="{ACCE34A3-913B-61D9-89A8-48881DD9195C}"/>
+              </a:ext>
+            </a:extLst>
+          </p:cNvPr>
           <p:cNvSpPr>
             <a:spLocks noGrp="1"/>
           </p:cNvSpPr>
@@ -3135,13 +3375,24 @@
             <p:ph idx="1"/>
           </p:nvPr>
         </p:nvSpPr>
-        <p:spPr/>
-        <p:txBody>
-          <a:bodyPr/>
-          <a:lstStyle/>
-          <a:p>
-            <a:r>
-              <a:t>This presentation covers the development and evaluation of a deep learning model for semantic segmentation of brain tumors using MRI scans from the BRATS dataset. We use a 2D U-Net architecture enhanced with transfer learning.</a:t>
+        <p:spPr>
+          <a:xfrm>
+            <a:off x="457200" y="5574484"/>
+            <a:ext cx="8229600" cy="551679"/>
+          </a:xfrm>
+        </p:spPr>
+        <p:txBody>
+          <a:bodyPr>
+            <a:normAutofit/>
+          </a:bodyPr>
+          <a:lstStyle/>
+          <a:p>
+            <a:pPr marL="0" indent="0" algn="r">
+              <a:buNone/>
+            </a:pPr>
+            <a:r>
+              <a:rPr lang="en-US" dirty="0"/>
+              <a:t>Adrian-Valentin Ciu</a:t>
             </a:r>
           </a:p>
         </p:txBody>
@@ -3155,7 +3406,7 @@
 </file>
 
 <file path=ppt/slides/slide10.xml><?xml version="1.0" encoding="utf-8"?>
-<p:sld xmlns:a="http://schemas.openxmlformats.org/drawingml/2006/main" xmlns:p="http://schemas.openxmlformats.org/presentationml/2006/main" xmlns:r="http://schemas.openxmlformats.org/officeDocument/2006/relationships">
+<p:sld xmlns:a="http://schemas.openxmlformats.org/drawingml/2006/main" xmlns:r="http://schemas.openxmlformats.org/officeDocument/2006/relationships" xmlns:p="http://schemas.openxmlformats.org/presentationml/2006/main">
   <p:cSld>
     <p:spTree>
       <p:nvGrpSpPr>
@@ -3163,7 +3414,14 @@
         <p:cNvGrpSpPr/>
         <p:nvPr/>
       </p:nvGrpSpPr>
-      <p:grpSpPr/>
+      <p:grpSpPr>
+        <a:xfrm>
+          <a:off x="0" y="0"/>
+          <a:ext cx="0" cy="0"/>
+          <a:chOff x="0" y="0"/>
+          <a:chExt cx="0" cy="0"/>
+        </a:xfrm>
+      </p:grpSpPr>
       <p:sp>
         <p:nvSpPr>
           <p:cNvPr id="2" name="Title 1"/>
@@ -3180,7 +3438,7 @@
           <a:lstStyle/>
           <a:p>
             <a:r>
-              <a:t>Validation Strategy</a:t>
+              <a:t>Training Configuration</a:t>
             </a:r>
           </a:p>
         </p:txBody>
@@ -3201,22 +3459,48 @@
           <a:lstStyle/>
           <a:p>
             <a:r>
-              <a:t>- Split dataset 80/20 into training and validation</a:t>
-            </a:r>
-          </a:p>
-          <a:p>
-            <a:r>
-              <a:t>- Validation set used only for evaluation</a:t>
-            </a:r>
-          </a:p>
-          <a:p>
-            <a:r>
-              <a:t>- Dice score monitored to check generalization</a:t>
-            </a:r>
-          </a:p>
-          <a:p>
-            <a:r>
-              <a:t>- Helps guide early stopping and model tuning</a:t>
+              <a:rPr dirty="0"/>
+              <a:t>- Loss: </a:t>
+            </a:r>
+            <a:r>
+              <a:rPr dirty="0" err="1"/>
+              <a:t>CrossEntropyLoss</a:t>
+            </a:r>
+            <a:r>
+              <a:rPr dirty="0"/>
+              <a:t> (multi-class)</a:t>
+            </a:r>
+          </a:p>
+          <a:p>
+            <a:r>
+              <a:rPr dirty="0"/>
+              <a:t>- Optimizer: Adam</a:t>
+            </a:r>
+          </a:p>
+          <a:p>
+            <a:r>
+              <a:rPr dirty="0"/>
+              <a:t>- Learning rate: 1e-3, batch size: 8</a:t>
+            </a:r>
+          </a:p>
+          <a:p>
+            <a:r>
+              <a:rPr dirty="0"/>
+              <a:t>- Training for </a:t>
+            </a:r>
+            <a:r>
+              <a:rPr lang="en-US" dirty="0"/>
+              <a:t>3</a:t>
+            </a:r>
+            <a:r>
+              <a:rPr dirty="0"/>
+              <a:t>+ epochs</a:t>
+            </a:r>
+          </a:p>
+          <a:p>
+            <a:r>
+              <a:rPr dirty="0"/>
+              <a:t>- Run on GPU if available</a:t>
             </a:r>
           </a:p>
         </p:txBody>
@@ -3230,7 +3514,7 @@
 </file>
 
 <file path=ppt/slides/slide11.xml><?xml version="1.0" encoding="utf-8"?>
-<p:sld xmlns:a="http://schemas.openxmlformats.org/drawingml/2006/main" xmlns:p="http://schemas.openxmlformats.org/presentationml/2006/main" xmlns:r="http://schemas.openxmlformats.org/officeDocument/2006/relationships">
+<p:sld xmlns:a="http://schemas.openxmlformats.org/drawingml/2006/main" xmlns:r="http://schemas.openxmlformats.org/officeDocument/2006/relationships" xmlns:p="http://schemas.openxmlformats.org/presentationml/2006/main">
   <p:cSld>
     <p:spTree>
       <p:nvGrpSpPr>
@@ -3238,7 +3522,14 @@
         <p:cNvGrpSpPr/>
         <p:nvPr/>
       </p:nvGrpSpPr>
-      <p:grpSpPr/>
+      <p:grpSpPr>
+        <a:xfrm>
+          <a:off x="0" y="0"/>
+          <a:ext cx="0" cy="0"/>
+          <a:chOff x="0" y="0"/>
+          <a:chExt cx="0" cy="0"/>
+        </a:xfrm>
+      </p:grpSpPr>
       <p:sp>
         <p:nvSpPr>
           <p:cNvPr id="2" name="Title 1"/>
@@ -3255,7 +3546,7 @@
           <a:lstStyle/>
           <a:p>
             <a:r>
-              <a:t>Early Stopping</a:t>
+              <a:t>Validation Strategy</a:t>
             </a:r>
           </a:p>
         </p:txBody>
@@ -3276,22 +3567,57 @@
           <a:lstStyle/>
           <a:p>
             <a:r>
-              <a:t>- Monitors validation Dice score</a:t>
-            </a:r>
-          </a:p>
-          <a:p>
-            <a:r>
-              <a:t>- Stops training if no improvement for 5 epochs</a:t>
-            </a:r>
-          </a:p>
-          <a:p>
-            <a:r>
-              <a:t>- Prevents overfitting and wasted compute</a:t>
-            </a:r>
-          </a:p>
-          <a:p>
-            <a:r>
-              <a:t>- Custom early stopping callback implemented</a:t>
+              <a:rPr dirty="0"/>
+              <a:t>- Split dataset </a:t>
+            </a:r>
+            <a:r>
+              <a:rPr lang="en-US" dirty="0"/>
+              <a:t>70</a:t>
+            </a:r>
+            <a:r>
+              <a:rPr dirty="0"/>
+              <a:t>/</a:t>
+            </a:r>
+            <a:r>
+              <a:rPr lang="en-US" dirty="0"/>
+              <a:t>15/15</a:t>
+            </a:r>
+            <a:r>
+              <a:rPr dirty="0"/>
+              <a:t> into training</a:t>
+            </a:r>
+            <a:r>
+              <a:rPr lang="en-US" dirty="0"/>
+              <a:t>, </a:t>
+            </a:r>
+            <a:r>
+              <a:rPr dirty="0"/>
+              <a:t>validation</a:t>
+            </a:r>
+            <a:r>
+              <a:rPr lang="en-US" dirty="0"/>
+              <a:t> and test</a:t>
+            </a:r>
+            <a:endParaRPr dirty="0"/>
+          </a:p>
+          <a:p>
+            <a:r>
+              <a:rPr dirty="0"/>
+              <a:t>- </a:t>
+            </a:r>
+            <a:r>
+              <a:rPr lang="en-US" dirty="0"/>
+              <a:t>Test</a:t>
+            </a:r>
+            <a:r>
+              <a:rPr dirty="0"/>
+              <a:t> set used only for evaluation</a:t>
+            </a:r>
+          </a:p>
+          <a:p>
+            <a:r>
+              <a:rPr dirty="0"/>
+              <a:t>- Dice score monitored to check generalization</a:t>
             </a:r>
           </a:p>
         </p:txBody>
@@ -3305,7 +3631,7 @@
 </file>
 
 <file path=ppt/slides/slide12.xml><?xml version="1.0" encoding="utf-8"?>
-<p:sld xmlns:a="http://schemas.openxmlformats.org/drawingml/2006/main" xmlns:p="http://schemas.openxmlformats.org/presentationml/2006/main" xmlns:r="http://schemas.openxmlformats.org/officeDocument/2006/relationships">
+<p:sld xmlns:a="http://schemas.openxmlformats.org/drawingml/2006/main" xmlns:r="http://schemas.openxmlformats.org/officeDocument/2006/relationships" xmlns:p="http://schemas.openxmlformats.org/presentationml/2006/main">
   <p:cSld>
     <p:spTree>
       <p:nvGrpSpPr>
@@ -3313,7 +3639,14 @@
         <p:cNvGrpSpPr/>
         <p:nvPr/>
       </p:nvGrpSpPr>
-      <p:grpSpPr/>
+      <p:grpSpPr>
+        <a:xfrm>
+          <a:off x="0" y="0"/>
+          <a:ext cx="0" cy="0"/>
+          <a:chOff x="0" y="0"/>
+          <a:chExt cx="0" cy="0"/>
+        </a:xfrm>
+      </p:grpSpPr>
       <p:sp>
         <p:nvSpPr>
           <p:cNvPr id="2" name="Title 1"/>
@@ -3330,7 +3663,7 @@
           <a:lstStyle/>
           <a:p>
             <a:r>
-              <a:t>Model Evaluation Metrics</a:t>
+              <a:t>Early Stopping</a:t>
             </a:r>
           </a:p>
         </p:txBody>
@@ -3351,17 +3684,26 @@
           <a:lstStyle/>
           <a:p>
             <a:r>
-              <a:t>- Dice Score (per class and average)</a:t>
-            </a:r>
-          </a:p>
-          <a:p>
-            <a:r>
-              <a:t>- Pixel accuracy: correct pixels / total pixels</a:t>
-            </a:r>
-          </a:p>
-          <a:p>
-            <a:r>
-              <a:t>- Optional: confusion matrix to analyze misclassifications</a:t>
+              <a:rPr dirty="0"/>
+              <a:t>- Monitors validation Dice score</a:t>
+            </a:r>
+          </a:p>
+          <a:p>
+            <a:r>
+              <a:rPr dirty="0"/>
+              <a:t>- Stops training if no improvement for 5 epochs</a:t>
+            </a:r>
+          </a:p>
+          <a:p>
+            <a:r>
+              <a:rPr dirty="0"/>
+              <a:t>- Prevents overfitting and wasted compute</a:t>
+            </a:r>
+          </a:p>
+          <a:p>
+            <a:r>
+              <a:rPr dirty="0"/>
+              <a:t>- Custom early stopping callback implemented</a:t>
             </a:r>
           </a:p>
         </p:txBody>
@@ -3375,7 +3717,7 @@
 </file>
 
 <file path=ppt/slides/slide13.xml><?xml version="1.0" encoding="utf-8"?>
-<p:sld xmlns:a="http://schemas.openxmlformats.org/drawingml/2006/main" xmlns:p="http://schemas.openxmlformats.org/presentationml/2006/main" xmlns:r="http://schemas.openxmlformats.org/officeDocument/2006/relationships">
+<p:sld xmlns:a="http://schemas.openxmlformats.org/drawingml/2006/main" xmlns:r="http://schemas.openxmlformats.org/officeDocument/2006/relationships" xmlns:p="http://schemas.openxmlformats.org/presentationml/2006/main">
   <p:cSld>
     <p:spTree>
       <p:nvGrpSpPr>
@@ -3383,7 +3725,14 @@
         <p:cNvGrpSpPr/>
         <p:nvPr/>
       </p:nvGrpSpPr>
-      <p:grpSpPr/>
+      <p:grpSpPr>
+        <a:xfrm>
+          <a:off x="0" y="0"/>
+          <a:ext cx="0" cy="0"/>
+          <a:chOff x="0" y="0"/>
+          <a:chExt cx="0" cy="0"/>
+        </a:xfrm>
+      </p:grpSpPr>
       <p:sp>
         <p:nvSpPr>
           <p:cNvPr id="2" name="Title 1"/>
@@ -3400,7 +3749,7 @@
           <a:lstStyle/>
           <a:p>
             <a:r>
-              <a:t>Visualizing Predictions</a:t>
+              <a:t>Model Evaluation Metrics</a:t>
             </a:r>
           </a:p>
         </p:txBody>
@@ -3421,17 +3770,17 @@
           <a:lstStyle/>
           <a:p>
             <a:r>
-              <a:t>- Compare original image, ground truth, and prediction</a:t>
-            </a:r>
-          </a:p>
-          <a:p>
-            <a:r>
-              <a:t>- Helps qualitatively assess performance</a:t>
-            </a:r>
-          </a:p>
-          <a:p>
-            <a:r>
-              <a:t>- Highlights failure modes or strong segmentation results</a:t>
+              <a:t>- Dice Score (per class and average)</a:t>
+            </a:r>
+          </a:p>
+          <a:p>
+            <a:r>
+              <a:t>- Pixel accuracy: correct pixels / total pixels</a:t>
+            </a:r>
+          </a:p>
+          <a:p>
+            <a:r>
+              <a:t>- Optional: confusion matrix to analyze misclassifications</a:t>
             </a:r>
           </a:p>
         </p:txBody>
@@ -3445,7 +3794,7 @@
 </file>
 
 <file path=ppt/slides/slide14.xml><?xml version="1.0" encoding="utf-8"?>
-<p:sld xmlns:a="http://schemas.openxmlformats.org/drawingml/2006/main" xmlns:p="http://schemas.openxmlformats.org/presentationml/2006/main" xmlns:r="http://schemas.openxmlformats.org/officeDocument/2006/relationships">
+<p:sld xmlns:a="http://schemas.openxmlformats.org/drawingml/2006/main" xmlns:r="http://schemas.openxmlformats.org/officeDocument/2006/relationships" xmlns:p="http://schemas.openxmlformats.org/presentationml/2006/main">
   <p:cSld>
     <p:spTree>
       <p:nvGrpSpPr>
@@ -3453,7 +3802,14 @@
         <p:cNvGrpSpPr/>
         <p:nvPr/>
       </p:nvGrpSpPr>
-      <p:grpSpPr/>
+      <p:grpSpPr>
+        <a:xfrm>
+          <a:off x="0" y="0"/>
+          <a:ext cx="0" cy="0"/>
+          <a:chOff x="0" y="0"/>
+          <a:chExt cx="0" cy="0"/>
+        </a:xfrm>
+      </p:grpSpPr>
       <p:sp>
         <p:nvSpPr>
           <p:cNvPr id="2" name="Title 1"/>
@@ -3470,7 +3826,7 @@
           <a:lstStyle/>
           <a:p>
             <a:r>
-              <a:t>Model Saving and Loading</a:t>
+              <a:t>Visualizing Predictions</a:t>
             </a:r>
           </a:p>
         </p:txBody>
@@ -3491,22 +3847,17 @@
           <a:lstStyle/>
           <a:p>
             <a:r>
-              <a:t>- Save path: models/unet2d_final.pth</a:t>
-            </a:r>
-          </a:p>
-          <a:p>
-            <a:r>
-              <a:t>- Format: model.state_dict() in PyTorch</a:t>
-            </a:r>
-          </a:p>
-          <a:p>
-            <a:r>
-              <a:t>- Supports reproducibility and fine-tuning</a:t>
-            </a:r>
-          </a:p>
-          <a:p>
-            <a:r>
-              <a:t>- Can reload model for inference or continued training</a:t>
+              <a:t>- Compare original image, ground truth, and prediction</a:t>
+            </a:r>
+          </a:p>
+          <a:p>
+            <a:r>
+              <a:t>- Helps qualitatively assess performance</a:t>
+            </a:r>
+          </a:p>
+          <a:p>
+            <a:r>
+              <a:t>- Highlights failure modes or strong segmentation results</a:t>
             </a:r>
           </a:p>
         </p:txBody>
@@ -3520,7 +3871,7 @@
 </file>
 
 <file path=ppt/slides/slide15.xml><?xml version="1.0" encoding="utf-8"?>
-<p:sld xmlns:a="http://schemas.openxmlformats.org/drawingml/2006/main" xmlns:p="http://schemas.openxmlformats.org/presentationml/2006/main" xmlns:r="http://schemas.openxmlformats.org/officeDocument/2006/relationships">
+<p:sld xmlns:a="http://schemas.openxmlformats.org/drawingml/2006/main" xmlns:r="http://schemas.openxmlformats.org/officeDocument/2006/relationships" xmlns:p="http://schemas.openxmlformats.org/presentationml/2006/main">
   <p:cSld>
     <p:spTree>
       <p:nvGrpSpPr>
@@ -3528,7 +3879,14 @@
         <p:cNvGrpSpPr/>
         <p:nvPr/>
       </p:nvGrpSpPr>
-      <p:grpSpPr/>
+      <p:grpSpPr>
+        <a:xfrm>
+          <a:off x="0" y="0"/>
+          <a:ext cx="0" cy="0"/>
+          <a:chOff x="0" y="0"/>
+          <a:chExt cx="0" cy="0"/>
+        </a:xfrm>
+      </p:grpSpPr>
       <p:sp>
         <p:nvSpPr>
           <p:cNvPr id="2" name="Title 1"/>
@@ -3545,7 +3903,7 @@
           <a:lstStyle/>
           <a:p>
             <a:r>
-              <a:t>Summary of Results</a:t>
+              <a:t>Model Saving and Loading</a:t>
             </a:r>
           </a:p>
         </p:txBody>
@@ -3566,22 +3924,22 @@
           <a:lstStyle/>
           <a:p>
             <a:r>
-              <a:t>- Average Dice Score ~0.78 (variable)</a:t>
-            </a:r>
-          </a:p>
-          <a:p>
-            <a:r>
-              <a:t>- Enhancing tumor class performed best</a:t>
-            </a:r>
-          </a:p>
-          <a:p>
-            <a:r>
-              <a:t>- Challenges: class imbalance, similar textures</a:t>
-            </a:r>
-          </a:p>
-          <a:p>
-            <a:r>
-              <a:t>- 2D U-Net with transfer learning performs well</a:t>
+              <a:t>- Save path: models/unet2d_final.pth</a:t>
+            </a:r>
+          </a:p>
+          <a:p>
+            <a:r>
+              <a:t>- Format: model.state_dict() in PyTorch</a:t>
+            </a:r>
+          </a:p>
+          <a:p>
+            <a:r>
+              <a:t>- Supports reproducibility and fine-tuning</a:t>
+            </a:r>
+          </a:p>
+          <a:p>
+            <a:r>
+              <a:t>- Can reload model for inference or continued training</a:t>
             </a:r>
           </a:p>
         </p:txBody>
@@ -3595,7 +3953,7 @@
 </file>
 
 <file path=ppt/slides/slide16.xml><?xml version="1.0" encoding="utf-8"?>
-<p:sld xmlns:a="http://schemas.openxmlformats.org/drawingml/2006/main" xmlns:p="http://schemas.openxmlformats.org/presentationml/2006/main" xmlns:r="http://schemas.openxmlformats.org/officeDocument/2006/relationships">
+<p:sld xmlns:a="http://schemas.openxmlformats.org/drawingml/2006/main" xmlns:r="http://schemas.openxmlformats.org/officeDocument/2006/relationships" xmlns:p="http://schemas.openxmlformats.org/presentationml/2006/main">
   <p:cSld>
     <p:spTree>
       <p:nvGrpSpPr>
@@ -3603,7 +3961,14 @@
         <p:cNvGrpSpPr/>
         <p:nvPr/>
       </p:nvGrpSpPr>
-      <p:grpSpPr/>
+      <p:grpSpPr>
+        <a:xfrm>
+          <a:off x="0" y="0"/>
+          <a:ext cx="0" cy="0"/>
+          <a:chOff x="0" y="0"/>
+          <a:chExt cx="0" cy="0"/>
+        </a:xfrm>
+      </p:grpSpPr>
       <p:sp>
         <p:nvSpPr>
           <p:cNvPr id="2" name="Title 1"/>
@@ -3620,7 +3985,7 @@
           <a:lstStyle/>
           <a:p>
             <a:r>
-              <a:t>Future Work</a:t>
+              <a:t>Summary of Results</a:t>
             </a:r>
           </a:p>
         </p:txBody>
@@ -3641,22 +4006,22 @@
           <a:lstStyle/>
           <a:p>
             <a:r>
-              <a:t>- Upgrade to 3D U-Net for volumetric context</a:t>
-            </a:r>
-          </a:p>
-          <a:p>
-            <a:r>
-              <a:t>- Use all modalities as multi-channel input</a:t>
-            </a:r>
-          </a:p>
-          <a:p>
-            <a:r>
-              <a:t>- Integrate data augmentation (elastic transforms, flips)</a:t>
-            </a:r>
-          </a:p>
-          <a:p>
-            <a:r>
-              <a:t>- Test other pretrained encoders (e.g., EfficientNet)</a:t>
+              <a:t>- Average Dice Score ~0.78 (variable)</a:t>
+            </a:r>
+          </a:p>
+          <a:p>
+            <a:r>
+              <a:t>- Enhancing tumor class performed best</a:t>
+            </a:r>
+          </a:p>
+          <a:p>
+            <a:r>
+              <a:t>- Challenges: class imbalance, similar textures</a:t>
+            </a:r>
+          </a:p>
+          <a:p>
+            <a:r>
+              <a:t>- 2D U-Net with transfer learning performs well</a:t>
             </a:r>
           </a:p>
         </p:txBody>
@@ -3670,7 +4035,7 @@
 </file>
 
 <file path=ppt/slides/slide17.xml><?xml version="1.0" encoding="utf-8"?>
-<p:sld xmlns:a="http://schemas.openxmlformats.org/drawingml/2006/main" xmlns:p="http://schemas.openxmlformats.org/presentationml/2006/main" xmlns:r="http://schemas.openxmlformats.org/officeDocument/2006/relationships">
+<p:sld xmlns:a="http://schemas.openxmlformats.org/drawingml/2006/main" xmlns:r="http://schemas.openxmlformats.org/officeDocument/2006/relationships" xmlns:p="http://schemas.openxmlformats.org/presentationml/2006/main">
   <p:cSld>
     <p:spTree>
       <p:nvGrpSpPr>
@@ -3678,7 +4043,14 @@
         <p:cNvGrpSpPr/>
         <p:nvPr/>
       </p:nvGrpSpPr>
-      <p:grpSpPr/>
+      <p:grpSpPr>
+        <a:xfrm>
+          <a:off x="0" y="0"/>
+          <a:ext cx="0" cy="0"/>
+          <a:chOff x="0" y="0"/>
+          <a:chExt cx="0" cy="0"/>
+        </a:xfrm>
+      </p:grpSpPr>
       <p:sp>
         <p:nvSpPr>
           <p:cNvPr id="2" name="Title 1"/>
@@ -3695,6 +4067,88 @@
           <a:lstStyle/>
           <a:p>
             <a:r>
+              <a:t>Future Work</a:t>
+            </a:r>
+          </a:p>
+        </p:txBody>
+      </p:sp>
+      <p:sp>
+        <p:nvSpPr>
+          <p:cNvPr id="3" name="Content Placeholder 2"/>
+          <p:cNvSpPr>
+            <a:spLocks noGrp="1"/>
+          </p:cNvSpPr>
+          <p:nvPr>
+            <p:ph idx="1"/>
+          </p:nvPr>
+        </p:nvSpPr>
+        <p:spPr/>
+        <p:txBody>
+          <a:bodyPr/>
+          <a:lstStyle/>
+          <a:p>
+            <a:r>
+              <a:t>- Upgrade to 3D U-Net for volumetric context</a:t>
+            </a:r>
+          </a:p>
+          <a:p>
+            <a:r>
+              <a:t>- Use all modalities as multi-channel input</a:t>
+            </a:r>
+          </a:p>
+          <a:p>
+            <a:r>
+              <a:t>- Integrate data augmentation (elastic transforms, flips)</a:t>
+            </a:r>
+          </a:p>
+          <a:p>
+            <a:r>
+              <a:t>- Test other pretrained encoders (e.g., EfficientNet)</a:t>
+            </a:r>
+          </a:p>
+        </p:txBody>
+      </p:sp>
+    </p:spTree>
+  </p:cSld>
+  <p:clrMapOvr>
+    <a:masterClrMapping/>
+  </p:clrMapOvr>
+</p:sld>
+</file>
+
+<file path=ppt/slides/slide18.xml><?xml version="1.0" encoding="utf-8"?>
+<p:sld xmlns:a="http://schemas.openxmlformats.org/drawingml/2006/main" xmlns:r="http://schemas.openxmlformats.org/officeDocument/2006/relationships" xmlns:p="http://schemas.openxmlformats.org/presentationml/2006/main">
+  <p:cSld>
+    <p:spTree>
+      <p:nvGrpSpPr>
+        <p:cNvPr id="1" name=""/>
+        <p:cNvGrpSpPr/>
+        <p:nvPr/>
+      </p:nvGrpSpPr>
+      <p:grpSpPr>
+        <a:xfrm>
+          <a:off x="0" y="0"/>
+          <a:ext cx="0" cy="0"/>
+          <a:chOff x="0" y="0"/>
+          <a:chExt cx="0" cy="0"/>
+        </a:xfrm>
+      </p:grpSpPr>
+      <p:sp>
+        <p:nvSpPr>
+          <p:cNvPr id="2" name="Title 1"/>
+          <p:cNvSpPr>
+            <a:spLocks noGrp="1"/>
+          </p:cNvSpPr>
+          <p:nvPr>
+            <p:ph type="title"/>
+          </p:nvPr>
+        </p:nvSpPr>
+        <p:spPr/>
+        <p:txBody>
+          <a:bodyPr/>
+          <a:lstStyle/>
+          <a:p>
+            <a:r>
               <a:t>References and Resources</a:t>
             </a:r>
           </a:p>
@@ -3712,7 +4166,9 @@
         </p:nvSpPr>
         <p:spPr/>
         <p:txBody>
-          <a:bodyPr/>
+          <a:bodyPr>
+            <a:normAutofit/>
+          </a:bodyPr>
           <a:lstStyle/>
           <a:p>
             <a:r>
@@ -3750,7 +4206,7 @@
 </file>
 
 <file path=ppt/slides/slide2.xml><?xml version="1.0" encoding="utf-8"?>
-<p:sld xmlns:a="http://schemas.openxmlformats.org/drawingml/2006/main" xmlns:p="http://schemas.openxmlformats.org/presentationml/2006/main" xmlns:r="http://schemas.openxmlformats.org/officeDocument/2006/relationships">
+<p:sld xmlns:a="http://schemas.openxmlformats.org/drawingml/2006/main" xmlns:r="http://schemas.openxmlformats.org/officeDocument/2006/relationships" xmlns:p="http://schemas.openxmlformats.org/presentationml/2006/main">
   <p:cSld>
     <p:spTree>
       <p:nvGrpSpPr>
@@ -3758,10 +4214,23 @@
         <p:cNvGrpSpPr/>
         <p:nvPr/>
       </p:nvGrpSpPr>
-      <p:grpSpPr/>
-      <p:sp>
-        <p:nvSpPr>
-          <p:cNvPr id="2" name="Title 1"/>
+      <p:grpSpPr>
+        <a:xfrm>
+          <a:off x="0" y="0"/>
+          <a:ext cx="0" cy="0"/>
+          <a:chOff x="0" y="0"/>
+          <a:chExt cx="0" cy="0"/>
+        </a:xfrm>
+      </p:grpSpPr>
+      <p:sp>
+        <p:nvSpPr>
+          <p:cNvPr id="2" name="Title 1">
+            <a:extLst>
+              <a:ext uri="{FF2B5EF4-FFF2-40B4-BE49-F238E27FC236}">
+                <a16:creationId xmlns:a16="http://schemas.microsoft.com/office/drawing/2014/main" id="{1BEAF8A9-DCCD-FFFA-E3E5-A47530849287}"/>
+              </a:ext>
+            </a:extLst>
+          </p:cNvPr>
           <p:cNvSpPr>
             <a:spLocks noGrp="1"/>
           </p:cNvSpPr>
@@ -3775,14 +4244,15 @@
           <a:lstStyle/>
           <a:p>
             <a:r>
-              <a:t>Dataset Overview</a:t>
-            </a:r>
-          </a:p>
-        </p:txBody>
-      </p:sp>
-      <p:sp>
-        <p:nvSpPr>
-          <p:cNvPr id="3" name="Content Placeholder 2"/>
+              <a:rPr lang="en-US" dirty="0"/>
+              <a:t>semantic segmentation</a:t>
+            </a:r>
+          </a:p>
+        </p:txBody>
+      </p:sp>
+      <p:sp>
+        <p:nvSpPr>
+          <p:cNvPr id="4" name="Content Placeholder 2"/>
           <p:cNvSpPr>
             <a:spLocks noGrp="1"/>
           </p:cNvSpPr>
@@ -3792,36 +4262,37 @@
         </p:nvSpPr>
         <p:spPr/>
         <p:txBody>
-          <a:bodyPr/>
-          <a:lstStyle/>
-          <a:p>
-            <a:r>
-              <a:t>Dataset: BRATS (Brain Tumor Segmentation Challenge)</a:t>
-            </a:r>
-          </a:p>
-          <a:p>
-            <a:r>
-              <a:t>- Data format: 3D NIfTI (.nii.gz)</a:t>
-            </a:r>
-          </a:p>
-          <a:p>
-            <a:r>
-              <a:t>- Modalities: FLAIR, T1w, T1gd, T2w</a:t>
-            </a:r>
-          </a:p>
-          <a:p>
-            <a:r>
-              <a:t>- Labels: 0 - Background, 1 - Edema, 2 - Non-enhancing tumor, 3 - Enhancing tumor</a:t>
-            </a:r>
-          </a:p>
-          <a:p>
-            <a:r>
-              <a:t>- 484 labeled training samples, 266 test samples (unlabeled)</a:t>
-            </a:r>
+          <a:bodyPr>
+            <a:normAutofit/>
+          </a:bodyPr>
+          <a:lstStyle/>
+          <a:p>
+            <a:r>
+              <a:rPr sz="2200" dirty="0"/>
+              <a:t>This presentation covers the development and evaluation of a deep learning model for semantic segmentation of brain tumors using MRI scans from the BRATS dataset. </a:t>
+            </a:r>
+            <a:r>
+              <a:rPr lang="en-US" sz="2200" dirty="0"/>
+              <a:t>I</a:t>
+            </a:r>
+            <a:r>
+              <a:rPr sz="2200" dirty="0"/>
+              <a:t> use a 2D U-Net architectur</a:t>
+            </a:r>
+            <a:r>
+              <a:rPr lang="en-US" sz="2200" dirty="0"/>
+              <a:t>e.</a:t>
+            </a:r>
+            <a:endParaRPr sz="2200" dirty="0"/>
           </a:p>
         </p:txBody>
       </p:sp>
     </p:spTree>
+    <p:extLst>
+      <p:ext uri="{BB962C8B-B14F-4D97-AF65-F5344CB8AC3E}">
+        <p14:creationId xmlns:p14="http://schemas.microsoft.com/office/powerpoint/2010/main" val="1389823460"/>
+      </p:ext>
+    </p:extLst>
   </p:cSld>
   <p:clrMapOvr>
     <a:masterClrMapping/>
@@ -3830,7 +4301,7 @@
 </file>
 
 <file path=ppt/slides/slide3.xml><?xml version="1.0" encoding="utf-8"?>
-<p:sld xmlns:a="http://schemas.openxmlformats.org/drawingml/2006/main" xmlns:p="http://schemas.openxmlformats.org/presentationml/2006/main" xmlns:r="http://schemas.openxmlformats.org/officeDocument/2006/relationships">
+<p:sld xmlns:a="http://schemas.openxmlformats.org/drawingml/2006/main" xmlns:r="http://schemas.openxmlformats.org/officeDocument/2006/relationships" xmlns:p="http://schemas.openxmlformats.org/presentationml/2006/main">
   <p:cSld>
     <p:spTree>
       <p:nvGrpSpPr>
@@ -3838,7 +4309,14 @@
         <p:cNvGrpSpPr/>
         <p:nvPr/>
       </p:nvGrpSpPr>
-      <p:grpSpPr/>
+      <p:grpSpPr>
+        <a:xfrm>
+          <a:off x="0" y="0"/>
+          <a:ext cx="0" cy="0"/>
+          <a:chOff x="0" y="0"/>
+          <a:chExt cx="0" cy="0"/>
+        </a:xfrm>
+      </p:grpSpPr>
       <p:sp>
         <p:nvSpPr>
           <p:cNvPr id="2" name="Title 1"/>
@@ -3855,7 +4333,7 @@
           <a:lstStyle/>
           <a:p>
             <a:r>
-              <a:t>Task Definition</a:t>
+              <a:t>Dataset Overview</a:t>
             </a:r>
           </a:p>
         </p:txBody>
@@ -3876,22 +4354,27 @@
           <a:lstStyle/>
           <a:p>
             <a:r>
-              <a:t>Problem Type: Semantic segmentation</a:t>
-            </a:r>
-          </a:p>
-          <a:p>
-            <a:r>
-              <a:t>- Input: 2D axial MRI slices</a:t>
-            </a:r>
-          </a:p>
-          <a:p>
-            <a:r>
-              <a:t>- Output: Pixel-wise label masks (4 classes)</a:t>
-            </a:r>
-          </a:p>
-          <a:p>
-            <a:r>
-              <a:t>- Objective: Accurately localize and classify tumor subregions</a:t>
+              <a:t>Dataset: BRATS (Brain Tumor Segmentation Challenge)</a:t>
+            </a:r>
+          </a:p>
+          <a:p>
+            <a:r>
+              <a:t>- Data format: 3D NIfTI (.nii.gz)</a:t>
+            </a:r>
+          </a:p>
+          <a:p>
+            <a:r>
+              <a:t>- Modalities: FLAIR, T1w, T1gd, T2w</a:t>
+            </a:r>
+          </a:p>
+          <a:p>
+            <a:r>
+              <a:t>- Labels: 0 - Background, 1 - Edema, 2 - Non-enhancing tumor, 3 - Enhancing tumor</a:t>
+            </a:r>
+          </a:p>
+          <a:p>
+            <a:r>
+              <a:t>- 484 labeled training samples, 266 test samples (unlabeled)</a:t>
             </a:r>
           </a:p>
         </p:txBody>
@@ -3905,7 +4388,7 @@
 </file>
 
 <file path=ppt/slides/slide4.xml><?xml version="1.0" encoding="utf-8"?>
-<p:sld xmlns:a="http://schemas.openxmlformats.org/drawingml/2006/main" xmlns:p="http://schemas.openxmlformats.org/presentationml/2006/main" xmlns:r="http://schemas.openxmlformats.org/officeDocument/2006/relationships">
+<p:sld xmlns:a="http://schemas.openxmlformats.org/drawingml/2006/main" xmlns:r="http://schemas.openxmlformats.org/officeDocument/2006/relationships" xmlns:p="http://schemas.openxmlformats.org/presentationml/2006/main">
   <p:cSld>
     <p:spTree>
       <p:nvGrpSpPr>
@@ -3913,7 +4396,14 @@
         <p:cNvGrpSpPr/>
         <p:nvPr/>
       </p:nvGrpSpPr>
-      <p:grpSpPr/>
+      <p:grpSpPr>
+        <a:xfrm>
+          <a:off x="0" y="0"/>
+          <a:ext cx="0" cy="0"/>
+          <a:chOff x="0" y="0"/>
+          <a:chExt cx="0" cy="0"/>
+        </a:xfrm>
+      </p:grpSpPr>
       <p:sp>
         <p:nvSpPr>
           <p:cNvPr id="2" name="Title 1"/>
@@ -3930,7 +4420,7 @@
           <a:lstStyle/>
           <a:p>
             <a:r>
-              <a:t>Preprocessing Strategy</a:t>
+              <a:t>Task Definition</a:t>
             </a:r>
           </a:p>
         </p:txBody>
@@ -3951,22 +4441,22 @@
           <a:lstStyle/>
           <a:p>
             <a:r>
-              <a:t>- Extract 2D axial slices containing tumors</a:t>
-            </a:r>
-          </a:p>
-          <a:p>
-            <a:r>
-              <a:t>- Normalize each slice using Z-score normalization</a:t>
-            </a:r>
-          </a:p>
-          <a:p>
-            <a:r>
-              <a:t>- Use lazy loading to manage memory efficiently</a:t>
-            </a:r>
-          </a:p>
-          <a:p>
-            <a:r>
-              <a:t>- Convert slices to shape: (1, H, W) for CNN input</a:t>
+              <a:t>Problem Type: Semantic segmentation</a:t>
+            </a:r>
+          </a:p>
+          <a:p>
+            <a:r>
+              <a:t>- Input: 2D axial MRI slices</a:t>
+            </a:r>
+          </a:p>
+          <a:p>
+            <a:r>
+              <a:t>- Output: Pixel-wise label masks (4 classes)</a:t>
+            </a:r>
+          </a:p>
+          <a:p>
+            <a:r>
+              <a:t>- Objective: Accurately localize and classify tumor subregions</a:t>
             </a:r>
           </a:p>
         </p:txBody>
@@ -3980,7 +4470,7 @@
 </file>
 
 <file path=ppt/slides/slide5.xml><?xml version="1.0" encoding="utf-8"?>
-<p:sld xmlns:a="http://schemas.openxmlformats.org/drawingml/2006/main" xmlns:p="http://schemas.openxmlformats.org/presentationml/2006/main" xmlns:r="http://schemas.openxmlformats.org/officeDocument/2006/relationships">
+<p:sld xmlns:a="http://schemas.openxmlformats.org/drawingml/2006/main" xmlns:r="http://schemas.openxmlformats.org/officeDocument/2006/relationships" xmlns:p="http://schemas.openxmlformats.org/presentationml/2006/main">
   <p:cSld>
     <p:spTree>
       <p:nvGrpSpPr>
@@ -3988,7 +4478,14 @@
         <p:cNvGrpSpPr/>
         <p:nvPr/>
       </p:nvGrpSpPr>
-      <p:grpSpPr/>
+      <p:grpSpPr>
+        <a:xfrm>
+          <a:off x="0" y="0"/>
+          <a:ext cx="0" cy="0"/>
+          <a:chOff x="0" y="0"/>
+          <a:chExt cx="0" cy="0"/>
+        </a:xfrm>
+      </p:grpSpPr>
       <p:sp>
         <p:nvSpPr>
           <p:cNvPr id="2" name="Title 1"/>
@@ -4005,7 +4502,7 @@
           <a:lstStyle/>
           <a:p>
             <a:r>
-              <a:t>Dataset Implementation</a:t>
+              <a:t>Preprocessing Strategy</a:t>
             </a:r>
           </a:p>
         </p:txBody>
@@ -4026,27 +4523,22 @@
           <a:lstStyle/>
           <a:p>
             <a:r>
-              <a:t>- Custom PyTorch Dataset class</a:t>
-            </a:r>
-          </a:p>
-          <a:p>
-            <a:r>
-              <a:t>- Load NIfTI files using nibabel</a:t>
-            </a:r>
-          </a:p>
-          <a:p>
-            <a:r>
-              <a:t>- Normalize on the fly in __getitem__</a:t>
-            </a:r>
-          </a:p>
-          <a:p>
-            <a:r>
-              <a:t>- Efficient slice indexing and filtering</a:t>
-            </a:r>
-          </a:p>
-          <a:p>
-            <a:r>
-              <a:t>- Optional hooks for data augmentation</a:t>
+              <a:t>- Extract 2D axial slices containing tumors</a:t>
+            </a:r>
+          </a:p>
+          <a:p>
+            <a:r>
+              <a:t>- Normalize each slice using Z-score normalization</a:t>
+            </a:r>
+          </a:p>
+          <a:p>
+            <a:r>
+              <a:t>- Use lazy loading to manage memory efficiently</a:t>
+            </a:r>
+          </a:p>
+          <a:p>
+            <a:r>
+              <a:t>- Convert slices to shape: (1, H, W) for CNN input</a:t>
             </a:r>
           </a:p>
         </p:txBody>
@@ -4060,7 +4552,7 @@
 </file>
 
 <file path=ppt/slides/slide6.xml><?xml version="1.0" encoding="utf-8"?>
-<p:sld xmlns:a="http://schemas.openxmlformats.org/drawingml/2006/main" xmlns:p="http://schemas.openxmlformats.org/presentationml/2006/main" xmlns:r="http://schemas.openxmlformats.org/officeDocument/2006/relationships">
+<p:sld xmlns:a="http://schemas.openxmlformats.org/drawingml/2006/main" xmlns:r="http://schemas.openxmlformats.org/officeDocument/2006/relationships" xmlns:p="http://schemas.openxmlformats.org/presentationml/2006/main">
   <p:cSld>
     <p:spTree>
       <p:nvGrpSpPr>
@@ -4068,7 +4560,14 @@
         <p:cNvGrpSpPr/>
         <p:nvPr/>
       </p:nvGrpSpPr>
-      <p:grpSpPr/>
+      <p:grpSpPr>
+        <a:xfrm>
+          <a:off x="0" y="0"/>
+          <a:ext cx="0" cy="0"/>
+          <a:chOff x="0" y="0"/>
+          <a:chExt cx="0" cy="0"/>
+        </a:xfrm>
+      </p:grpSpPr>
       <p:sp>
         <p:nvSpPr>
           <p:cNvPr id="2" name="Title 1"/>
@@ -4085,7 +4584,7 @@
           <a:lstStyle/>
           <a:p>
             <a:r>
-              <a:t>Visualization of Samples</a:t>
+              <a:t>Dataset Implementation</a:t>
             </a:r>
           </a:p>
         </p:txBody>
@@ -4106,22 +4605,27 @@
           <a:lstStyle/>
           <a:p>
             <a:r>
-              <a:t>- Plotted 2D MRI slices alongside segmentation masks</a:t>
-            </a:r>
-          </a:p>
-          <a:p>
-            <a:r>
-              <a:t>- Used consistent color mapping (nipy_spectral)</a:t>
-            </a:r>
-          </a:p>
-          <a:p>
-            <a:r>
-              <a:t>- Ensured masks are correctly aligned with inputs</a:t>
-            </a:r>
-          </a:p>
-          <a:p>
-            <a:r>
-              <a:t>- Aids in verifying dataset integrity before training</a:t>
+              <a:t>- Custom PyTorch Dataset class</a:t>
+            </a:r>
+          </a:p>
+          <a:p>
+            <a:r>
+              <a:t>- Load NIfTI files using nibabel</a:t>
+            </a:r>
+          </a:p>
+          <a:p>
+            <a:r>
+              <a:t>- Normalize on the fly in __getitem__</a:t>
+            </a:r>
+          </a:p>
+          <a:p>
+            <a:r>
+              <a:t>- Efficient slice indexing and filtering</a:t>
+            </a:r>
+          </a:p>
+          <a:p>
+            <a:r>
+              <a:t>- Optional hooks for data augmentation</a:t>
             </a:r>
           </a:p>
         </p:txBody>
@@ -4135,7 +4639,7 @@
 </file>
 
 <file path=ppt/slides/slide7.xml><?xml version="1.0" encoding="utf-8"?>
-<p:sld xmlns:a="http://schemas.openxmlformats.org/drawingml/2006/main" xmlns:p="http://schemas.openxmlformats.org/presentationml/2006/main" xmlns:r="http://schemas.openxmlformats.org/officeDocument/2006/relationships">
+<p:sld xmlns:a="http://schemas.openxmlformats.org/drawingml/2006/main" xmlns:r="http://schemas.openxmlformats.org/officeDocument/2006/relationships" xmlns:p="http://schemas.openxmlformats.org/presentationml/2006/main">
   <p:cSld>
     <p:spTree>
       <p:nvGrpSpPr>
@@ -4143,7 +4647,14 @@
         <p:cNvGrpSpPr/>
         <p:nvPr/>
       </p:nvGrpSpPr>
-      <p:grpSpPr/>
+      <p:grpSpPr>
+        <a:xfrm>
+          <a:off x="0" y="0"/>
+          <a:ext cx="0" cy="0"/>
+          <a:chOff x="0" y="0"/>
+          <a:chExt cx="0" cy="0"/>
+        </a:xfrm>
+      </p:grpSpPr>
       <p:sp>
         <p:nvSpPr>
           <p:cNvPr id="2" name="Title 1"/>
@@ -4160,7 +4671,7 @@
           <a:lstStyle/>
           <a:p>
             <a:r>
-              <a:t>Model Architecture: 2D U-Net</a:t>
+              <a:t>Visualization of Samples</a:t>
             </a:r>
           </a:p>
         </p:txBody>
@@ -4181,27 +4692,22 @@
           <a:lstStyle/>
           <a:p>
             <a:r>
-              <a:t>- Encoder-decoder structure</a:t>
-            </a:r>
-          </a:p>
-          <a:p>
-            <a:r>
-              <a:t>- Encoder: Convolutions + max pooling</a:t>
-            </a:r>
-          </a:p>
-          <a:p>
-            <a:r>
-              <a:t>- Decoder: Transposed convolutions + skip connections</a:t>
-            </a:r>
-          </a:p>
-          <a:p>
-            <a:r>
-              <a:t>- Final layer: 1x1 conv for class prediction</a:t>
-            </a:r>
-          </a:p>
-          <a:p>
-            <a:r>
-              <a:t>- Output shape: (batch_size, 4, H, W)</a:t>
+              <a:t>- Plotted 2D MRI slices alongside segmentation masks</a:t>
+            </a:r>
+          </a:p>
+          <a:p>
+            <a:r>
+              <a:t>- Used consistent color mapping (nipy_spectral)</a:t>
+            </a:r>
+          </a:p>
+          <a:p>
+            <a:r>
+              <a:t>- Ensured masks are correctly aligned with inputs</a:t>
+            </a:r>
+          </a:p>
+          <a:p>
+            <a:r>
+              <a:t>- Aids in verifying dataset integrity before training</a:t>
             </a:r>
           </a:p>
         </p:txBody>
@@ -4215,7 +4721,7 @@
 </file>
 
 <file path=ppt/slides/slide8.xml><?xml version="1.0" encoding="utf-8"?>
-<p:sld xmlns:a="http://schemas.openxmlformats.org/drawingml/2006/main" xmlns:p="http://schemas.openxmlformats.org/presentationml/2006/main" xmlns:r="http://schemas.openxmlformats.org/officeDocument/2006/relationships">
+<p:sld xmlns:a="http://schemas.openxmlformats.org/drawingml/2006/main" xmlns:r="http://schemas.openxmlformats.org/officeDocument/2006/relationships" xmlns:p="http://schemas.openxmlformats.org/presentationml/2006/main">
   <p:cSld>
     <p:spTree>
       <p:nvGrpSpPr>
@@ -4223,7 +4729,14 @@
         <p:cNvGrpSpPr/>
         <p:nvPr/>
       </p:nvGrpSpPr>
-      <p:grpSpPr/>
+      <p:grpSpPr>
+        <a:xfrm>
+          <a:off x="0" y="0"/>
+          <a:ext cx="0" cy="0"/>
+          <a:chOff x="0" y="0"/>
+          <a:chExt cx="0" cy="0"/>
+        </a:xfrm>
+      </p:grpSpPr>
       <p:sp>
         <p:nvSpPr>
           <p:cNvPr id="2" name="Title 1"/>
@@ -4240,7 +4753,15 @@
           <a:lstStyle/>
           <a:p>
             <a:r>
-              <a:t>Transfer Learning with ResNet Encoder</a:t>
+              <a:rPr dirty="0"/>
+              <a:t>Model Architecture: </a:t>
+            </a:r>
+            <a:br>
+              <a:rPr lang="en-US" dirty="0"/>
+            </a:br>
+            <a:r>
+              <a:rPr dirty="0"/>
+              <a:t>2D U-Net</a:t>
             </a:r>
           </a:p>
         </p:txBody>
@@ -4261,22 +4782,27 @@
           <a:lstStyle/>
           <a:p>
             <a:r>
-              <a:t>- Used segmentation_models.pytorch (SMP) library</a:t>
-            </a:r>
-          </a:p>
-          <a:p>
-            <a:r>
-              <a:t>- Encoder: Pretrained ResNet34 on ImageNet</a:t>
-            </a:r>
-          </a:p>
-          <a:p>
-            <a:r>
-              <a:t>- Input channels adjusted for grayscale MRI</a:t>
-            </a:r>
-          </a:p>
-          <a:p>
-            <a:r>
-              <a:t>- Benefits: faster convergence, improved generalization</a:t>
+              <a:t>- Encoder-decoder structure</a:t>
+            </a:r>
+          </a:p>
+          <a:p>
+            <a:r>
+              <a:t>- Encoder: Convolutions + max pooling</a:t>
+            </a:r>
+          </a:p>
+          <a:p>
+            <a:r>
+              <a:t>- Decoder: Transposed convolutions + skip connections</a:t>
+            </a:r>
+          </a:p>
+          <a:p>
+            <a:r>
+              <a:t>- Final layer: 1x1 conv for class prediction</a:t>
+            </a:r>
+          </a:p>
+          <a:p>
+            <a:r>
+              <a:t>- Output shape: (batch_size, 4, H, W)</a:t>
             </a:r>
           </a:p>
         </p:txBody>
@@ -4290,7 +4816,7 @@
 </file>
 
 <file path=ppt/slides/slide9.xml><?xml version="1.0" encoding="utf-8"?>
-<p:sld xmlns:a="http://schemas.openxmlformats.org/drawingml/2006/main" xmlns:p="http://schemas.openxmlformats.org/presentationml/2006/main" xmlns:r="http://schemas.openxmlformats.org/officeDocument/2006/relationships">
+<p:sld xmlns:a="http://schemas.openxmlformats.org/drawingml/2006/main" xmlns:r="http://schemas.openxmlformats.org/officeDocument/2006/relationships" xmlns:p="http://schemas.openxmlformats.org/presentationml/2006/main">
   <p:cSld>
     <p:spTree>
       <p:nvGrpSpPr>
@@ -4298,7 +4824,14 @@
         <p:cNvGrpSpPr/>
         <p:nvPr/>
       </p:nvGrpSpPr>
-      <p:grpSpPr/>
+      <p:grpSpPr>
+        <a:xfrm>
+          <a:off x="0" y="0"/>
+          <a:ext cx="0" cy="0"/>
+          <a:chOff x="0" y="0"/>
+          <a:chExt cx="0" cy="0"/>
+        </a:xfrm>
+      </p:grpSpPr>
       <p:sp>
         <p:nvSpPr>
           <p:cNvPr id="2" name="Title 1"/>
@@ -4311,11 +4844,13 @@
         </p:nvSpPr>
         <p:spPr/>
         <p:txBody>
-          <a:bodyPr/>
-          <a:lstStyle/>
-          <a:p>
-            <a:r>
-              <a:t>Training Configuration</a:t>
+          <a:bodyPr>
+            <a:normAutofit/>
+          </a:bodyPr>
+          <a:lstStyle/>
+          <a:p>
+            <a:r>
+              <a:t>Transfer Learning with ResNet Encoder</a:t>
             </a:r>
           </a:p>
         </p:txBody>
@@ -4336,27 +4871,22 @@
           <a:lstStyle/>
           <a:p>
             <a:r>
-              <a:t>- Loss: CrossEntropyLoss (multi-class)</a:t>
-            </a:r>
-          </a:p>
-          <a:p>
-            <a:r>
-              <a:t>- Optimizer: Adam</a:t>
-            </a:r>
-          </a:p>
-          <a:p>
-            <a:r>
-              <a:t>- Learning rate: 1e-3, batch size: 8</a:t>
-            </a:r>
-          </a:p>
-          <a:p>
-            <a:r>
-              <a:t>- Training for 10+ epochs</a:t>
-            </a:r>
-          </a:p>
-          <a:p>
-            <a:r>
-              <a:t>- Run on GPU if available</a:t>
+              <a:t>- Used segmentation_models.pytorch (SMP) library</a:t>
+            </a:r>
+          </a:p>
+          <a:p>
+            <a:r>
+              <a:t>- Encoder: Pretrained ResNet34 on ImageNet</a:t>
+            </a:r>
+          </a:p>
+          <a:p>
+            <a:r>
+              <a:t>- Input channels adjusted for grayscale MRI</a:t>
+            </a:r>
+          </a:p>
+          <a:p>
+            <a:r>
+              <a:t>- Benefits: faster convergence, improved generalization</a:t>
             </a:r>
           </a:p>
         </p:txBody>
@@ -4370,91 +4900,58 @@
 </file>
 
 <file path=ppt/theme/theme1.xml><?xml version="1.0" encoding="utf-8"?>
-<a:theme xmlns:a="http://schemas.openxmlformats.org/drawingml/2006/main" name="Office Theme">
+<a:theme xmlns:a="http://schemas.openxmlformats.org/drawingml/2006/main" name="Parcel">
   <a:themeElements>
-    <a:clrScheme name="Office">
+    <a:clrScheme name="Parcel">
       <a:dk1>
-        <a:sysClr val="windowText" lastClr="000000"/>
+        <a:srgbClr val="000000"/>
       </a:dk1>
       <a:lt1>
-        <a:sysClr val="window" lastClr="FFFFFF"/>
+        <a:srgbClr val="FFFFFF"/>
       </a:lt1>
       <a:dk2>
-        <a:srgbClr val="1F497D"/>
+        <a:srgbClr val="4A5356"/>
       </a:dk2>
       <a:lt2>
-        <a:srgbClr val="EEECE1"/>
+        <a:srgbClr val="E8E3CE"/>
       </a:lt2>
       <a:accent1>
-        <a:srgbClr val="4F81BD"/>
+        <a:srgbClr val="F6A21D"/>
       </a:accent1>
       <a:accent2>
-        <a:srgbClr val="C0504D"/>
+        <a:srgbClr val="9BAFB5"/>
       </a:accent2>
       <a:accent3>
-        <a:srgbClr val="9BBB59"/>
+        <a:srgbClr val="C96731"/>
       </a:accent3>
       <a:accent4>
-        <a:srgbClr val="8064A2"/>
+        <a:srgbClr val="9CA383"/>
       </a:accent4>
       <a:accent5>
-        <a:srgbClr val="4BACC6"/>
+        <a:srgbClr val="87795D"/>
       </a:accent5>
       <a:accent6>
-        <a:srgbClr val="F79646"/>
+        <a:srgbClr val="A0988C"/>
       </a:accent6>
       <a:hlink>
-        <a:srgbClr val="0000FF"/>
+        <a:srgbClr val="00B0F0"/>
       </a:hlink>
       <a:folHlink>
-        <a:srgbClr val="800080"/>
+        <a:srgbClr val="738F97"/>
       </a:folHlink>
     </a:clrScheme>
-    <a:fontScheme name="Office">
+    <a:fontScheme name="Parcel">
       <a:majorFont>
-        <a:latin typeface="Calibri"/>
+        <a:latin typeface="Gill Sans MT" panose="020B0502020104020203"/>
         <a:ea typeface=""/>
         <a:cs typeface=""/>
-        <a:font script="Jpan" typeface="ＭＳ Ｐゴシック"/>
-        <a:font script="Hang" typeface="맑은 고딕"/>
-        <a:font script="Hans" typeface="宋体"/>
-        <a:font script="Hant" typeface="新細明體"/>
-        <a:font script="Arab" typeface="Times New Roman"/>
-        <a:font script="Hebr" typeface="Times New Roman"/>
-        <a:font script="Thai" typeface="Angsana New"/>
-        <a:font script="Ethi" typeface="Nyala"/>
-        <a:font script="Beng" typeface="Vrinda"/>
-        <a:font script="Gujr" typeface="Shruti"/>
-        <a:font script="Khmr" typeface="MoolBoran"/>
-        <a:font script="Knda" typeface="Tunga"/>
-        <a:font script="Guru" typeface="Raavi"/>
-        <a:font script="Cans" typeface="Euphemia"/>
-        <a:font script="Cher" typeface="Plantagenet Cherokee"/>
-        <a:font script="Yiii" typeface="Microsoft Yi Baiti"/>
-        <a:font script="Tibt" typeface="Microsoft Himalaya"/>
-        <a:font script="Thaa" typeface="MV Boli"/>
-        <a:font script="Deva" typeface="Mangal"/>
-        <a:font script="Telu" typeface="Gautami"/>
-        <a:font script="Taml" typeface="Latha"/>
-        <a:font script="Syrc" typeface="Estrangelo Edessa"/>
-        <a:font script="Orya" typeface="Kalinga"/>
-        <a:font script="Mlym" typeface="Kartika"/>
-        <a:font script="Laoo" typeface="DokChampa"/>
-        <a:font script="Sinh" typeface="Iskoola Pota"/>
-        <a:font script="Mong" typeface="Mongolian Baiti"/>
-        <a:font script="Viet" typeface="Times New Roman"/>
-        <a:font script="Uigh" typeface="Microsoft Uighur"/>
-        <a:font script="Geor" typeface="Sylfaen"/>
-      </a:majorFont>
-      <a:minorFont>
-        <a:latin typeface="Calibri"/>
-        <a:ea typeface=""/>
-        <a:cs typeface=""/>
-        <a:font script="Jpan" typeface="ＭＳ Ｐゴシック"/>
-        <a:font script="Hang" typeface="맑은 고딕"/>
-        <a:font script="Hans" typeface="宋体"/>
-        <a:font script="Hant" typeface="新細明體"/>
-        <a:font script="Arab" typeface="Arial"/>
+        <a:font script="Grek" typeface="Corbel"/>
+        <a:font script="Cyrl" typeface="Corbel"/>
+        <a:font script="Jpan" typeface="HGｺﾞｼｯｸE"/>
+        <a:font script="Hang" typeface="휴먼매직체"/>
+        <a:font script="Hans" typeface="华文中宋"/>
+        <a:font script="Hant" typeface="微軟正黑體"/>
+        <a:font script="Arab" typeface="Majalla UI"/>
         <a:font script="Hebr" typeface="Arial"/>
         <a:font script="Thai" typeface="Cordia New"/>
         <a:font script="Ethi" typeface="Nyala"/>
@@ -4477,12 +4974,49 @@
         <a:font script="Laoo" typeface="DokChampa"/>
         <a:font script="Sinh" typeface="Iskoola Pota"/>
         <a:font script="Mong" typeface="Mongolian Baiti"/>
-        <a:font script="Viet" typeface="Arial"/>
+        <a:font script="Viet" typeface="Tahoma"/>
+        <a:font script="Uigh" typeface="Microsoft Uighur"/>
+        <a:font script="Geor" typeface="Sylfaen"/>
+      </a:majorFont>
+      <a:minorFont>
+        <a:latin typeface="Gill Sans MT" panose="020B0502020104020203"/>
+        <a:ea typeface=""/>
+        <a:cs typeface=""/>
+        <a:font script="Grek" typeface="Corbel"/>
+        <a:font script="Cyrl" typeface="Corbel"/>
+        <a:font script="Jpan" typeface="HGｺﾞｼｯｸE"/>
+        <a:font script="Hang" typeface="휴먼매직체"/>
+        <a:font script="Hans" typeface="华文中宋"/>
+        <a:font script="Hant" typeface="微軟正黑體"/>
+        <a:font script="Arab" typeface="Majalla UI"/>
+        <a:font script="Hebr" typeface="Arial"/>
+        <a:font script="Thai" typeface="Cordia New"/>
+        <a:font script="Ethi" typeface="Nyala"/>
+        <a:font script="Beng" typeface="Vrinda"/>
+        <a:font script="Gujr" typeface="Shruti"/>
+        <a:font script="Khmr" typeface="DaunPenh"/>
+        <a:font script="Knda" typeface="Tunga"/>
+        <a:font script="Guru" typeface="Raavi"/>
+        <a:font script="Cans" typeface="Euphemia"/>
+        <a:font script="Cher" typeface="Plantagenet Cherokee"/>
+        <a:font script="Yiii" typeface="Microsoft Yi Baiti"/>
+        <a:font script="Tibt" typeface="Microsoft Himalaya"/>
+        <a:font script="Thaa" typeface="MV Boli"/>
+        <a:font script="Deva" typeface="Mangal"/>
+        <a:font script="Telu" typeface="Gautami"/>
+        <a:font script="Taml" typeface="Latha"/>
+        <a:font script="Syrc" typeface="Estrangelo Edessa"/>
+        <a:font script="Orya" typeface="Kalinga"/>
+        <a:font script="Mlym" typeface="Kartika"/>
+        <a:font script="Laoo" typeface="DokChampa"/>
+        <a:font script="Sinh" typeface="Iskoola Pota"/>
+        <a:font script="Mong" typeface="Mongolian Baiti"/>
+        <a:font script="Viet" typeface="Tahoma"/>
         <a:font script="Uigh" typeface="Microsoft Uighur"/>
         <a:font script="Geor" typeface="Sylfaen"/>
       </a:minorFont>
     </a:fontScheme>
-    <a:fmtScheme name="Office">
+    <a:fmtScheme name="Parcel">
       <a:fillStyleLst>
         <a:solidFill>
           <a:schemeClr val="phClr"/>
@@ -4491,62 +5025,62 @@
           <a:gsLst>
             <a:gs pos="0">
               <a:schemeClr val="phClr">
-                <a:tint val="50000"/>
-                <a:satMod val="300000"/>
-              </a:schemeClr>
-            </a:gs>
-            <a:gs pos="35000">
-              <a:schemeClr val="phClr">
-                <a:tint val="37000"/>
-                <a:satMod val="300000"/>
+                <a:tint val="80000"/>
+                <a:satMod val="107000"/>
+                <a:lumMod val="103000"/>
               </a:schemeClr>
             </a:gs>
             <a:gs pos="100000">
               <a:schemeClr val="phClr">
-                <a:tint val="15000"/>
-                <a:satMod val="350000"/>
+                <a:tint val="82000"/>
+                <a:satMod val="109000"/>
+                <a:lumMod val="103000"/>
               </a:schemeClr>
             </a:gs>
           </a:gsLst>
-          <a:lin ang="16200000" scaled="1"/>
+          <a:lin ang="5400000" scaled="0"/>
         </a:gradFill>
         <a:gradFill rotWithShape="1">
           <a:gsLst>
             <a:gs pos="0">
               <a:schemeClr val="phClr">
-                <a:tint val="100000"/>
+                <a:tint val="97000"/>
+                <a:satMod val="100000"/>
+                <a:lumMod val="102000"/>
+              </a:schemeClr>
+            </a:gs>
+            <a:gs pos="50000">
+              <a:schemeClr val="phClr">
                 <a:shade val="100000"/>
-                <a:satMod val="130000"/>
+                <a:satMod val="103000"/>
+                <a:lumMod val="100000"/>
               </a:schemeClr>
             </a:gs>
             <a:gs pos="100000">
               <a:schemeClr val="phClr">
-                <a:tint val="50000"/>
-                <a:shade val="100000"/>
-                <a:satMod val="350000"/>
+                <a:shade val="93000"/>
+                <a:satMod val="110000"/>
+                <a:lumMod val="99000"/>
               </a:schemeClr>
             </a:gs>
           </a:gsLst>
-          <a:lin ang="16200000" scaled="0"/>
+          <a:lin ang="5400000" scaled="0"/>
         </a:gradFill>
       </a:fillStyleLst>
       <a:lnStyleLst>
-        <a:ln w="9525" cap="flat" cmpd="sng" algn="ctr">
-          <a:solidFill>
-            <a:schemeClr val="phClr">
-              <a:shade val="95000"/>
-              <a:satMod val="105000"/>
-            </a:schemeClr>
-          </a:solidFill>
-          <a:prstDash val="solid"/>
-        </a:ln>
-        <a:ln w="25400" cap="flat" cmpd="sng" algn="ctr">
+        <a:ln w="6350" cap="flat" cmpd="sng" algn="ctr">
           <a:solidFill>
             <a:schemeClr val="phClr"/>
           </a:solidFill>
           <a:prstDash val="solid"/>
         </a:ln>
-        <a:ln w="38100" cap="flat" cmpd="sng" algn="ctr">
+        <a:ln w="12700" cap="flat" cmpd="sng" algn="ctr">
+          <a:solidFill>
+            <a:schemeClr val="phClr"/>
+          </a:solidFill>
+          <a:prstDash val="solid"/>
+        </a:ln>
+        <a:ln w="31750" cap="flat" cmpd="sng" algn="ctr">
           <a:solidFill>
             <a:schemeClr val="phClr"/>
           </a:solidFill>
@@ -4555,28 +5089,16 @@
       </a:lnStyleLst>
       <a:effectStyleLst>
         <a:effectStyle>
-          <a:effectLst>
-            <a:outerShdw blurRad="40000" dist="20000" dir="5400000" rotWithShape="0">
-              <a:srgbClr val="000000">
-                <a:alpha val="38000"/>
-              </a:srgbClr>
-            </a:outerShdw>
-          </a:effectLst>
+          <a:effectLst/>
+        </a:effectStyle>
+        <a:effectStyle>
+          <a:effectLst/>
         </a:effectStyle>
         <a:effectStyle>
           <a:effectLst>
-            <a:outerShdw blurRad="40000" dist="23000" dir="5400000" rotWithShape="0">
+            <a:outerShdw blurRad="55880" dist="15240" dir="5400000" algn="ctr" rotWithShape="0">
               <a:srgbClr val="000000">
-                <a:alpha val="35000"/>
-              </a:srgbClr>
-            </a:outerShdw>
-          </a:effectLst>
-        </a:effectStyle>
-        <a:effectStyle>
-          <a:effectLst>
-            <a:outerShdw blurRad="40000" dist="23000" dir="5400000" rotWithShape="0">
-              <a:srgbClr val="000000">
-                <a:alpha val="35000"/>
+                <a:alpha val="45000"/>
               </a:srgbClr>
             </a:outerShdw>
           </a:effectLst>
@@ -4584,12 +5106,10 @@
             <a:camera prst="orthographicFront">
               <a:rot lat="0" lon="0" rev="0"/>
             </a:camera>
-            <a:lightRig rig="threePt" dir="t">
-              <a:rot lat="0" lon="0" rev="1200000"/>
-            </a:lightRig>
+            <a:lightRig rig="brightRoom" dir="tl"/>
           </a:scene3d>
-          <a:sp3d>
-            <a:bevelT w="63500" h="25400"/>
+          <a:sp3d prstMaterial="dkEdge">
+            <a:bevelT w="0" h="0"/>
           </a:sp3d>
         </a:effectStyle>
       </a:effectStyleLst>
@@ -4597,94 +5117,44 @@
         <a:solidFill>
           <a:schemeClr val="phClr"/>
         </a:solidFill>
+        <a:solidFill>
+          <a:schemeClr val="phClr">
+            <a:tint val="95000"/>
+            <a:satMod val="170000"/>
+          </a:schemeClr>
+        </a:solidFill>
         <a:gradFill rotWithShape="1">
           <a:gsLst>
             <a:gs pos="0">
               <a:schemeClr val="phClr">
-                <a:tint val="40000"/>
-                <a:satMod val="350000"/>
-              </a:schemeClr>
-            </a:gs>
-            <a:gs pos="40000">
-              <a:schemeClr val="phClr">
-                <a:tint val="45000"/>
-                <a:shade val="99000"/>
-                <a:satMod val="350000"/>
+                <a:tint val="97000"/>
+                <a:shade val="100000"/>
+                <a:satMod val="185000"/>
+                <a:lumMod val="120000"/>
               </a:schemeClr>
             </a:gs>
             <a:gs pos="100000">
               <a:schemeClr val="phClr">
-                <a:shade val="20000"/>
-                <a:satMod val="255000"/>
+                <a:tint val="96000"/>
+                <a:shade val="95000"/>
+                <a:satMod val="215000"/>
+                <a:lumMod val="80000"/>
               </a:schemeClr>
             </a:gs>
           </a:gsLst>
           <a:path path="circle">
-            <a:fillToRect l="50000" t="-80000" r="50000" b="180000"/>
-          </a:path>
-        </a:gradFill>
-        <a:gradFill rotWithShape="1">
-          <a:gsLst>
-            <a:gs pos="0">
-              <a:schemeClr val="phClr">
-                <a:tint val="80000"/>
-                <a:satMod val="300000"/>
-              </a:schemeClr>
-            </a:gs>
-            <a:gs pos="100000">
-              <a:schemeClr val="phClr">
-                <a:shade val="30000"/>
-                <a:satMod val="200000"/>
-              </a:schemeClr>
-            </a:gs>
-          </a:gsLst>
-          <a:path path="circle">
-            <a:fillToRect l="50000" t="50000" r="50000" b="50000"/>
+            <a:fillToRect l="50000" t="55000" r="125000" b="100000"/>
           </a:path>
         </a:gradFill>
       </a:bgFillStyleLst>
     </a:fmtScheme>
   </a:themeElements>
-  <a:objectDefaults>
-    <a:spDef>
-      <a:spPr/>
-      <a:bodyPr/>
-      <a:lstStyle/>
-      <a:style>
-        <a:lnRef idx="1">
-          <a:schemeClr val="accent1"/>
-        </a:lnRef>
-        <a:fillRef idx="3">
-          <a:schemeClr val="accent1"/>
-        </a:fillRef>
-        <a:effectRef idx="2">
-          <a:schemeClr val="accent1"/>
-        </a:effectRef>
-        <a:fontRef idx="minor">
-          <a:schemeClr val="lt1"/>
-        </a:fontRef>
-      </a:style>
-    </a:spDef>
-    <a:lnDef>
-      <a:spPr/>
-      <a:bodyPr/>
-      <a:lstStyle/>
-      <a:style>
-        <a:lnRef idx="2">
-          <a:schemeClr val="accent1"/>
-        </a:lnRef>
-        <a:fillRef idx="0">
-          <a:schemeClr val="accent1"/>
-        </a:fillRef>
-        <a:effectRef idx="1">
-          <a:schemeClr val="accent1"/>
-        </a:effectRef>
-        <a:fontRef idx="minor">
-          <a:schemeClr val="tx1"/>
-        </a:fontRef>
-      </a:style>
-    </a:lnDef>
-  </a:objectDefaults>
+  <a:objectDefaults/>
   <a:extraClrSchemeLst/>
+  <a:extLst>
+    <a:ext uri="{05A4C25C-085E-4340-85A3-A5531E510DB2}">
+      <thm15:themeFamily xmlns:thm15="http://schemas.microsoft.com/office/thememl/2012/main" name="Parcel" id="{8BEC4385-4EB9-4D53-BFB5-0EA123736B6D}" vid="{4DB32801-28C0-48B0-8C1D-A9A58613615A}"/>
+    </a:ext>
+  </a:extLst>
 </a:theme>
 </file>